--- a/7th Semester/CCE-411_Algorithm Engineering/Algo Mid murad sir part/K means Clustering 21-7-26-1.pptx
+++ b/7th Semester/CCE-411_Algorithm Engineering/Algo Mid murad sir part/K means Clustering 21-7-26-1.pptx
@@ -1,30 +1,30 @@
 
 <file path=ppt/presentation.xml><?xml version="1.0" encoding="utf-8"?>
-<p:presentation xmlns:a="http://schemas.openxmlformats.org/drawingml/2006/main" xmlns:r="http://schemas.openxmlformats.org/officeDocument/2006/relationships" xmlns:p="http://schemas.openxmlformats.org/presentationml/2006/main" saveSubsetFonts="1">
+<p:presentation xmlns:a="http://schemas.openxmlformats.org/drawingml/2006/main" xmlns:r="http://schemas.openxmlformats.org/officeDocument/2006/relationships" xmlns:p="http://schemas.openxmlformats.org/presentationml/2006/main">
   <p:sldMasterIdLst>
     <p:sldMasterId id="2147483648" r:id="rId1"/>
   </p:sldMasterIdLst>
   <p:sldIdLst>
-    <p:sldId id="256" r:id="rId2"/>
-    <p:sldId id="257" r:id="rId3"/>
-    <p:sldId id="259" r:id="rId4"/>
-    <p:sldId id="264" r:id="rId5"/>
-    <p:sldId id="265" r:id="rId6"/>
-    <p:sldId id="266" r:id="rId7"/>
-    <p:sldId id="267" r:id="rId8"/>
-    <p:sldId id="268" r:id="rId9"/>
-    <p:sldId id="269" r:id="rId10"/>
-    <p:sldId id="270" r:id="rId11"/>
-    <p:sldId id="260" r:id="rId12"/>
-    <p:sldId id="261" r:id="rId13"/>
-    <p:sldId id="262" r:id="rId14"/>
-    <p:sldId id="272" r:id="rId15"/>
-    <p:sldId id="271" r:id="rId16"/>
-    <p:sldId id="263" r:id="rId17"/>
-    <p:sldId id="273" r:id="rId18"/>
-    <p:sldId id="274" r:id="rId19"/>
-    <p:sldId id="275" r:id="rId20"/>
-    <p:sldId id="276" r:id="rId21"/>
+    <p:sldId id="256" r:id="rId3"/>
+    <p:sldId id="257" r:id="rId4"/>
+    <p:sldId id="259" r:id="rId5"/>
+    <p:sldId id="264" r:id="rId6"/>
+    <p:sldId id="265" r:id="rId7"/>
+    <p:sldId id="266" r:id="rId8"/>
+    <p:sldId id="267" r:id="rId9"/>
+    <p:sldId id="268" r:id="rId10"/>
+    <p:sldId id="269" r:id="rId11"/>
+    <p:sldId id="270" r:id="rId12"/>
+    <p:sldId id="260" r:id="rId13"/>
+    <p:sldId id="261" r:id="rId14"/>
+    <p:sldId id="262" r:id="rId15"/>
+    <p:sldId id="272" r:id="rId16"/>
+    <p:sldId id="271" r:id="rId17"/>
+    <p:sldId id="263" r:id="rId18"/>
+    <p:sldId id="273" r:id="rId19"/>
+    <p:sldId id="274" r:id="rId20"/>
+    <p:sldId id="275" r:id="rId21"/>
+    <p:sldId id="276" r:id="rId22"/>
   </p:sldIdLst>
   <p:sldSz cx="12192000" cy="6858000"/>
   <p:notesSz cx="6858000" cy="9144000"/>
@@ -126,12 +126,12 @@
   <p:extLst>
     <p:ext uri="{EFAFB233-063F-42B5-8137-9DF3F51BA10A}">
       <p15:sldGuideLst xmlns:p15="http://schemas.microsoft.com/office/powerpoint/2012/main">
-        <p15:guide id="1" orient="horz" pos="2160">
+        <p15:guide id="1" orient="horz" pos="2160" userDrawn="1">
           <p15:clr>
             <a:srgbClr val="A4A3A4"/>
           </p15:clr>
         </p15:guide>
-        <p15:guide id="2" pos="3840">
+        <p15:guide id="2" pos="3840" userDrawn="1">
           <p15:clr>
             <a:srgbClr val="A4A3A4"/>
           </p15:clr>
@@ -187,6 +187,7 @@
               <a:rPr lang="en-US"/>
               <a:t>Click to edit Master title style</a:t>
             </a:r>
+            <a:endParaRPr lang="en-US"/>
           </a:p>
         </p:txBody>
       </p:sp>
@@ -251,6 +252,7 @@
               <a:rPr lang="en-US"/>
               <a:t>Click to edit Master subtitle style</a:t>
             </a:r>
+            <a:endParaRPr lang="en-US"/>
           </a:p>
         </p:txBody>
       </p:sp>
@@ -271,8 +273,6 @@
           <a:p>
             <a:fld id="{4FB35DA8-B7CA-4C53-9105-91D1C2AF5D9E}" type="datetimeFigureOut">
               <a:rPr lang="en-US" smtClean="0"/>
-              <a:pPr/>
-              <a:t>7/22/2026</a:t>
             </a:fld>
             <a:endParaRPr lang="en-US"/>
           </a:p>
@@ -314,19 +314,12 @@
           <a:p>
             <a:fld id="{84B43C9B-0176-4BDF-AC43-CF4A3890E193}" type="slidenum">
               <a:rPr lang="en-US" smtClean="0"/>
-              <a:pPr/>
-              <a:t>‹#›</a:t>
             </a:fld>
             <a:endParaRPr lang="en-US"/>
           </a:p>
         </p:txBody>
       </p:sp>
     </p:spTree>
-    <p:extLst>
-      <p:ext uri="{BB962C8B-B14F-4D97-AF65-F5344CB8AC3E}">
-        <p14:creationId xmlns:p14="http://schemas.microsoft.com/office/powerpoint/2010/main" val="128161764"/>
-      </p:ext>
-    </p:extLst>
   </p:cSld>
   <p:clrMapOvr>
     <a:masterClrMapping/>
@@ -370,6 +363,7 @@
               <a:rPr lang="en-US"/>
               <a:t>Click to edit Master title style</a:t>
             </a:r>
+            <a:endParaRPr lang="en-US"/>
           </a:p>
         </p:txBody>
       </p:sp>
@@ -393,6 +387,7 @@
               <a:rPr lang="en-US"/>
               <a:t>Click to edit Master text styles</a:t>
             </a:r>
+            <a:endParaRPr lang="en-US"/>
           </a:p>
           <a:p>
             <a:pPr lvl="1"/>
@@ -400,6 +395,7 @@
               <a:rPr lang="en-US"/>
               <a:t>Second level</a:t>
             </a:r>
+            <a:endParaRPr lang="en-US"/>
           </a:p>
           <a:p>
             <a:pPr lvl="2"/>
@@ -407,6 +403,7 @@
               <a:rPr lang="en-US"/>
               <a:t>Third level</a:t>
             </a:r>
+            <a:endParaRPr lang="en-US"/>
           </a:p>
           <a:p>
             <a:pPr lvl="3"/>
@@ -414,6 +411,7 @@
               <a:rPr lang="en-US"/>
               <a:t>Fourth level</a:t>
             </a:r>
+            <a:endParaRPr lang="en-US"/>
           </a:p>
           <a:p>
             <a:pPr lvl="4"/>
@@ -421,6 +419,7 @@
               <a:rPr lang="en-US"/>
               <a:t>Fifth level</a:t>
             </a:r>
+            <a:endParaRPr lang="en-US"/>
           </a:p>
         </p:txBody>
       </p:sp>
@@ -441,8 +440,6 @@
           <a:p>
             <a:fld id="{4FB35DA8-B7CA-4C53-9105-91D1C2AF5D9E}" type="datetimeFigureOut">
               <a:rPr lang="en-US" smtClean="0"/>
-              <a:pPr/>
-              <a:t>7/22/2026</a:t>
             </a:fld>
             <a:endParaRPr lang="en-US"/>
           </a:p>
@@ -484,19 +481,12 @@
           <a:p>
             <a:fld id="{84B43C9B-0176-4BDF-AC43-CF4A3890E193}" type="slidenum">
               <a:rPr lang="en-US" smtClean="0"/>
-              <a:pPr/>
-              <a:t>‹#›</a:t>
             </a:fld>
             <a:endParaRPr lang="en-US"/>
           </a:p>
         </p:txBody>
       </p:sp>
     </p:spTree>
-    <p:extLst>
-      <p:ext uri="{BB962C8B-B14F-4D97-AF65-F5344CB8AC3E}">
-        <p14:creationId xmlns:p14="http://schemas.microsoft.com/office/powerpoint/2010/main" val="3197726211"/>
-      </p:ext>
-    </p:extLst>
   </p:cSld>
   <p:clrMapOvr>
     <a:masterClrMapping/>
@@ -545,6 +535,7 @@
               <a:rPr lang="en-US"/>
               <a:t>Click to edit Master title style</a:t>
             </a:r>
+            <a:endParaRPr lang="en-US"/>
           </a:p>
         </p:txBody>
       </p:sp>
@@ -573,6 +564,7 @@
               <a:rPr lang="en-US"/>
               <a:t>Click to edit Master text styles</a:t>
             </a:r>
+            <a:endParaRPr lang="en-US"/>
           </a:p>
           <a:p>
             <a:pPr lvl="1"/>
@@ -580,6 +572,7 @@
               <a:rPr lang="en-US"/>
               <a:t>Second level</a:t>
             </a:r>
+            <a:endParaRPr lang="en-US"/>
           </a:p>
           <a:p>
             <a:pPr lvl="2"/>
@@ -587,6 +580,7 @@
               <a:rPr lang="en-US"/>
               <a:t>Third level</a:t>
             </a:r>
+            <a:endParaRPr lang="en-US"/>
           </a:p>
           <a:p>
             <a:pPr lvl="3"/>
@@ -594,6 +588,7 @@
               <a:rPr lang="en-US"/>
               <a:t>Fourth level</a:t>
             </a:r>
+            <a:endParaRPr lang="en-US"/>
           </a:p>
           <a:p>
             <a:pPr lvl="4"/>
@@ -601,6 +596,7 @@
               <a:rPr lang="en-US"/>
               <a:t>Fifth level</a:t>
             </a:r>
+            <a:endParaRPr lang="en-US"/>
           </a:p>
         </p:txBody>
       </p:sp>
@@ -621,8 +617,6 @@
           <a:p>
             <a:fld id="{4FB35DA8-B7CA-4C53-9105-91D1C2AF5D9E}" type="datetimeFigureOut">
               <a:rPr lang="en-US" smtClean="0"/>
-              <a:pPr/>
-              <a:t>7/22/2026</a:t>
             </a:fld>
             <a:endParaRPr lang="en-US"/>
           </a:p>
@@ -664,19 +658,12 @@
           <a:p>
             <a:fld id="{84B43C9B-0176-4BDF-AC43-CF4A3890E193}" type="slidenum">
               <a:rPr lang="en-US" smtClean="0"/>
-              <a:pPr/>
-              <a:t>‹#›</a:t>
             </a:fld>
             <a:endParaRPr lang="en-US"/>
           </a:p>
         </p:txBody>
       </p:sp>
     </p:spTree>
-    <p:extLst>
-      <p:ext uri="{BB962C8B-B14F-4D97-AF65-F5344CB8AC3E}">
-        <p14:creationId xmlns:p14="http://schemas.microsoft.com/office/powerpoint/2010/main" val="461519305"/>
-      </p:ext>
-    </p:extLst>
   </p:cSld>
   <p:clrMapOvr>
     <a:masterClrMapping/>
@@ -720,6 +707,7 @@
               <a:rPr lang="en-US"/>
               <a:t>Click to edit Master title style</a:t>
             </a:r>
+            <a:endParaRPr lang="en-US"/>
           </a:p>
         </p:txBody>
       </p:sp>
@@ -743,6 +731,7 @@
               <a:rPr lang="en-US"/>
               <a:t>Click to edit Master text styles</a:t>
             </a:r>
+            <a:endParaRPr lang="en-US"/>
           </a:p>
           <a:p>
             <a:pPr lvl="1"/>
@@ -750,6 +739,7 @@
               <a:rPr lang="en-US"/>
               <a:t>Second level</a:t>
             </a:r>
+            <a:endParaRPr lang="en-US"/>
           </a:p>
           <a:p>
             <a:pPr lvl="2"/>
@@ -757,6 +747,7 @@
               <a:rPr lang="en-US"/>
               <a:t>Third level</a:t>
             </a:r>
+            <a:endParaRPr lang="en-US"/>
           </a:p>
           <a:p>
             <a:pPr lvl="3"/>
@@ -764,6 +755,7 @@
               <a:rPr lang="en-US"/>
               <a:t>Fourth level</a:t>
             </a:r>
+            <a:endParaRPr lang="en-US"/>
           </a:p>
           <a:p>
             <a:pPr lvl="4"/>
@@ -771,6 +763,7 @@
               <a:rPr lang="en-US"/>
               <a:t>Fifth level</a:t>
             </a:r>
+            <a:endParaRPr lang="en-US"/>
           </a:p>
         </p:txBody>
       </p:sp>
@@ -791,8 +784,6 @@
           <a:p>
             <a:fld id="{4FB35DA8-B7CA-4C53-9105-91D1C2AF5D9E}" type="datetimeFigureOut">
               <a:rPr lang="en-US" smtClean="0"/>
-              <a:pPr/>
-              <a:t>7/22/2026</a:t>
             </a:fld>
             <a:endParaRPr lang="en-US"/>
           </a:p>
@@ -834,19 +825,12 @@
           <a:p>
             <a:fld id="{84B43C9B-0176-4BDF-AC43-CF4A3890E193}" type="slidenum">
               <a:rPr lang="en-US" smtClean="0"/>
-              <a:pPr/>
-              <a:t>‹#›</a:t>
             </a:fld>
             <a:endParaRPr lang="en-US"/>
           </a:p>
         </p:txBody>
       </p:sp>
     </p:spTree>
-    <p:extLst>
-      <p:ext uri="{BB962C8B-B14F-4D97-AF65-F5344CB8AC3E}">
-        <p14:creationId xmlns:p14="http://schemas.microsoft.com/office/powerpoint/2010/main" val="1097161682"/>
-      </p:ext>
-    </p:extLst>
   </p:cSld>
   <p:clrMapOvr>
     <a:masterClrMapping/>
@@ -899,6 +883,7 @@
               <a:rPr lang="en-US"/>
               <a:t>Click to edit Master title style</a:t>
             </a:r>
+            <a:endParaRPr lang="en-US"/>
           </a:p>
         </p:txBody>
       </p:sp>
@@ -1018,6 +1003,7 @@
               <a:rPr lang="en-US"/>
               <a:t>Click to edit Master text styles</a:t>
             </a:r>
+            <a:endParaRPr lang="en-US"/>
           </a:p>
         </p:txBody>
       </p:sp>
@@ -1038,8 +1024,6 @@
           <a:p>
             <a:fld id="{4FB35DA8-B7CA-4C53-9105-91D1C2AF5D9E}" type="datetimeFigureOut">
               <a:rPr lang="en-US" smtClean="0"/>
-              <a:pPr/>
-              <a:t>7/22/2026</a:t>
             </a:fld>
             <a:endParaRPr lang="en-US"/>
           </a:p>
@@ -1081,19 +1065,12 @@
           <a:p>
             <a:fld id="{84B43C9B-0176-4BDF-AC43-CF4A3890E193}" type="slidenum">
               <a:rPr lang="en-US" smtClean="0"/>
-              <a:pPr/>
-              <a:t>‹#›</a:t>
             </a:fld>
             <a:endParaRPr lang="en-US"/>
           </a:p>
         </p:txBody>
       </p:sp>
     </p:spTree>
-    <p:extLst>
-      <p:ext uri="{BB962C8B-B14F-4D97-AF65-F5344CB8AC3E}">
-        <p14:creationId xmlns:p14="http://schemas.microsoft.com/office/powerpoint/2010/main" val="2846630234"/>
-      </p:ext>
-    </p:extLst>
   </p:cSld>
   <p:clrMapOvr>
     <a:masterClrMapping/>
@@ -1137,6 +1114,7 @@
               <a:rPr lang="en-US"/>
               <a:t>Click to edit Master title style</a:t>
             </a:r>
+            <a:endParaRPr lang="en-US"/>
           </a:p>
         </p:txBody>
       </p:sp>
@@ -1165,6 +1143,7 @@
               <a:rPr lang="en-US"/>
               <a:t>Click to edit Master text styles</a:t>
             </a:r>
+            <a:endParaRPr lang="en-US"/>
           </a:p>
           <a:p>
             <a:pPr lvl="1"/>
@@ -1172,6 +1151,7 @@
               <a:rPr lang="en-US"/>
               <a:t>Second level</a:t>
             </a:r>
+            <a:endParaRPr lang="en-US"/>
           </a:p>
           <a:p>
             <a:pPr lvl="2"/>
@@ -1179,6 +1159,7 @@
               <a:rPr lang="en-US"/>
               <a:t>Third level</a:t>
             </a:r>
+            <a:endParaRPr lang="en-US"/>
           </a:p>
           <a:p>
             <a:pPr lvl="3"/>
@@ -1186,6 +1167,7 @@
               <a:rPr lang="en-US"/>
               <a:t>Fourth level</a:t>
             </a:r>
+            <a:endParaRPr lang="en-US"/>
           </a:p>
           <a:p>
             <a:pPr lvl="4"/>
@@ -1193,6 +1175,7 @@
               <a:rPr lang="en-US"/>
               <a:t>Fifth level</a:t>
             </a:r>
+            <a:endParaRPr lang="en-US"/>
           </a:p>
         </p:txBody>
       </p:sp>
@@ -1221,6 +1204,7 @@
               <a:rPr lang="en-US"/>
               <a:t>Click to edit Master text styles</a:t>
             </a:r>
+            <a:endParaRPr lang="en-US"/>
           </a:p>
           <a:p>
             <a:pPr lvl="1"/>
@@ -1228,6 +1212,7 @@
               <a:rPr lang="en-US"/>
               <a:t>Second level</a:t>
             </a:r>
+            <a:endParaRPr lang="en-US"/>
           </a:p>
           <a:p>
             <a:pPr lvl="2"/>
@@ -1235,6 +1220,7 @@
               <a:rPr lang="en-US"/>
               <a:t>Third level</a:t>
             </a:r>
+            <a:endParaRPr lang="en-US"/>
           </a:p>
           <a:p>
             <a:pPr lvl="3"/>
@@ -1242,6 +1228,7 @@
               <a:rPr lang="en-US"/>
               <a:t>Fourth level</a:t>
             </a:r>
+            <a:endParaRPr lang="en-US"/>
           </a:p>
           <a:p>
             <a:pPr lvl="4"/>
@@ -1249,6 +1236,7 @@
               <a:rPr lang="en-US"/>
               <a:t>Fifth level</a:t>
             </a:r>
+            <a:endParaRPr lang="en-US"/>
           </a:p>
         </p:txBody>
       </p:sp>
@@ -1269,8 +1257,6 @@
           <a:p>
             <a:fld id="{4FB35DA8-B7CA-4C53-9105-91D1C2AF5D9E}" type="datetimeFigureOut">
               <a:rPr lang="en-US" smtClean="0"/>
-              <a:pPr/>
-              <a:t>7/22/2026</a:t>
             </a:fld>
             <a:endParaRPr lang="en-US"/>
           </a:p>
@@ -1312,19 +1298,12 @@
           <a:p>
             <a:fld id="{84B43C9B-0176-4BDF-AC43-CF4A3890E193}" type="slidenum">
               <a:rPr lang="en-US" smtClean="0"/>
-              <a:pPr/>
-              <a:t>‹#›</a:t>
             </a:fld>
             <a:endParaRPr lang="en-US"/>
           </a:p>
         </p:txBody>
       </p:sp>
     </p:spTree>
-    <p:extLst>
-      <p:ext uri="{BB962C8B-B14F-4D97-AF65-F5344CB8AC3E}">
-        <p14:creationId xmlns:p14="http://schemas.microsoft.com/office/powerpoint/2010/main" val="3382686764"/>
-      </p:ext>
-    </p:extLst>
   </p:cSld>
   <p:clrMapOvr>
     <a:masterClrMapping/>
@@ -1373,6 +1352,7 @@
               <a:rPr lang="en-US"/>
               <a:t>Click to edit Master title style</a:t>
             </a:r>
+            <a:endParaRPr lang="en-US"/>
           </a:p>
         </p:txBody>
       </p:sp>
@@ -1438,6 +1418,7 @@
               <a:rPr lang="en-US"/>
               <a:t>Click to edit Master text styles</a:t>
             </a:r>
+            <a:endParaRPr lang="en-US"/>
           </a:p>
         </p:txBody>
       </p:sp>
@@ -1466,6 +1447,7 @@
               <a:rPr lang="en-US"/>
               <a:t>Click to edit Master text styles</a:t>
             </a:r>
+            <a:endParaRPr lang="en-US"/>
           </a:p>
           <a:p>
             <a:pPr lvl="1"/>
@@ -1473,6 +1455,7 @@
               <a:rPr lang="en-US"/>
               <a:t>Second level</a:t>
             </a:r>
+            <a:endParaRPr lang="en-US"/>
           </a:p>
           <a:p>
             <a:pPr lvl="2"/>
@@ -1480,6 +1463,7 @@
               <a:rPr lang="en-US"/>
               <a:t>Third level</a:t>
             </a:r>
+            <a:endParaRPr lang="en-US"/>
           </a:p>
           <a:p>
             <a:pPr lvl="3"/>
@@ -1487,6 +1471,7 @@
               <a:rPr lang="en-US"/>
               <a:t>Fourth level</a:t>
             </a:r>
+            <a:endParaRPr lang="en-US"/>
           </a:p>
           <a:p>
             <a:pPr lvl="4"/>
@@ -1494,6 +1479,7 @@
               <a:rPr lang="en-US"/>
               <a:t>Fifth level</a:t>
             </a:r>
+            <a:endParaRPr lang="en-US"/>
           </a:p>
         </p:txBody>
       </p:sp>
@@ -1559,6 +1545,7 @@
               <a:rPr lang="en-US"/>
               <a:t>Click to edit Master text styles</a:t>
             </a:r>
+            <a:endParaRPr lang="en-US"/>
           </a:p>
         </p:txBody>
       </p:sp>
@@ -1587,6 +1574,7 @@
               <a:rPr lang="en-US"/>
               <a:t>Click to edit Master text styles</a:t>
             </a:r>
+            <a:endParaRPr lang="en-US"/>
           </a:p>
           <a:p>
             <a:pPr lvl="1"/>
@@ -1594,6 +1582,7 @@
               <a:rPr lang="en-US"/>
               <a:t>Second level</a:t>
             </a:r>
+            <a:endParaRPr lang="en-US"/>
           </a:p>
           <a:p>
             <a:pPr lvl="2"/>
@@ -1601,6 +1590,7 @@
               <a:rPr lang="en-US"/>
               <a:t>Third level</a:t>
             </a:r>
+            <a:endParaRPr lang="en-US"/>
           </a:p>
           <a:p>
             <a:pPr lvl="3"/>
@@ -1608,6 +1598,7 @@
               <a:rPr lang="en-US"/>
               <a:t>Fourth level</a:t>
             </a:r>
+            <a:endParaRPr lang="en-US"/>
           </a:p>
           <a:p>
             <a:pPr lvl="4"/>
@@ -1615,6 +1606,7 @@
               <a:rPr lang="en-US"/>
               <a:t>Fifth level</a:t>
             </a:r>
+            <a:endParaRPr lang="en-US"/>
           </a:p>
         </p:txBody>
       </p:sp>
@@ -1635,8 +1627,6 @@
           <a:p>
             <a:fld id="{4FB35DA8-B7CA-4C53-9105-91D1C2AF5D9E}" type="datetimeFigureOut">
               <a:rPr lang="en-US" smtClean="0"/>
-              <a:pPr/>
-              <a:t>7/22/2026</a:t>
             </a:fld>
             <a:endParaRPr lang="en-US"/>
           </a:p>
@@ -1678,19 +1668,12 @@
           <a:p>
             <a:fld id="{84B43C9B-0176-4BDF-AC43-CF4A3890E193}" type="slidenum">
               <a:rPr lang="en-US" smtClean="0"/>
-              <a:pPr/>
-              <a:t>‹#›</a:t>
             </a:fld>
             <a:endParaRPr lang="en-US"/>
           </a:p>
         </p:txBody>
       </p:sp>
     </p:spTree>
-    <p:extLst>
-      <p:ext uri="{BB962C8B-B14F-4D97-AF65-F5344CB8AC3E}">
-        <p14:creationId xmlns:p14="http://schemas.microsoft.com/office/powerpoint/2010/main" val="316377956"/>
-      </p:ext>
-    </p:extLst>
   </p:cSld>
   <p:clrMapOvr>
     <a:masterClrMapping/>
@@ -1734,6 +1717,7 @@
               <a:rPr lang="en-US"/>
               <a:t>Click to edit Master title style</a:t>
             </a:r>
+            <a:endParaRPr lang="en-US"/>
           </a:p>
         </p:txBody>
       </p:sp>
@@ -1754,8 +1738,6 @@
           <a:p>
             <a:fld id="{4FB35DA8-B7CA-4C53-9105-91D1C2AF5D9E}" type="datetimeFigureOut">
               <a:rPr lang="en-US" smtClean="0"/>
-              <a:pPr/>
-              <a:t>7/22/2026</a:t>
             </a:fld>
             <a:endParaRPr lang="en-US"/>
           </a:p>
@@ -1797,19 +1779,12 @@
           <a:p>
             <a:fld id="{84B43C9B-0176-4BDF-AC43-CF4A3890E193}" type="slidenum">
               <a:rPr lang="en-US" smtClean="0"/>
-              <a:pPr/>
-              <a:t>‹#›</a:t>
             </a:fld>
             <a:endParaRPr lang="en-US"/>
           </a:p>
         </p:txBody>
       </p:sp>
     </p:spTree>
-    <p:extLst>
-      <p:ext uri="{BB962C8B-B14F-4D97-AF65-F5344CB8AC3E}">
-        <p14:creationId xmlns:p14="http://schemas.microsoft.com/office/powerpoint/2010/main" val="3582745239"/>
-      </p:ext>
-    </p:extLst>
   </p:cSld>
   <p:clrMapOvr>
     <a:masterClrMapping/>
@@ -1851,8 +1826,6 @@
           <a:p>
             <a:fld id="{4FB35DA8-B7CA-4C53-9105-91D1C2AF5D9E}" type="datetimeFigureOut">
               <a:rPr lang="en-US" smtClean="0"/>
-              <a:pPr/>
-              <a:t>7/22/2026</a:t>
             </a:fld>
             <a:endParaRPr lang="en-US"/>
           </a:p>
@@ -1894,19 +1867,12 @@
           <a:p>
             <a:fld id="{84B43C9B-0176-4BDF-AC43-CF4A3890E193}" type="slidenum">
               <a:rPr lang="en-US" smtClean="0"/>
-              <a:pPr/>
-              <a:t>‹#›</a:t>
             </a:fld>
             <a:endParaRPr lang="en-US"/>
           </a:p>
         </p:txBody>
       </p:sp>
     </p:spTree>
-    <p:extLst>
-      <p:ext uri="{BB962C8B-B14F-4D97-AF65-F5344CB8AC3E}">
-        <p14:creationId xmlns:p14="http://schemas.microsoft.com/office/powerpoint/2010/main" val="112541610"/>
-      </p:ext>
-    </p:extLst>
   </p:cSld>
   <p:clrMapOvr>
     <a:masterClrMapping/>
@@ -1959,6 +1925,7 @@
               <a:rPr lang="en-US"/>
               <a:t>Click to edit Master title style</a:t>
             </a:r>
+            <a:endParaRPr lang="en-US"/>
           </a:p>
         </p:txBody>
       </p:sp>
@@ -2015,6 +1982,7 @@
               <a:rPr lang="en-US"/>
               <a:t>Click to edit Master text styles</a:t>
             </a:r>
+            <a:endParaRPr lang="en-US"/>
           </a:p>
           <a:p>
             <a:pPr lvl="1"/>
@@ -2022,6 +1990,7 @@
               <a:rPr lang="en-US"/>
               <a:t>Second level</a:t>
             </a:r>
+            <a:endParaRPr lang="en-US"/>
           </a:p>
           <a:p>
             <a:pPr lvl="2"/>
@@ -2029,6 +1998,7 @@
               <a:rPr lang="en-US"/>
               <a:t>Third level</a:t>
             </a:r>
+            <a:endParaRPr lang="en-US"/>
           </a:p>
           <a:p>
             <a:pPr lvl="3"/>
@@ -2036,6 +2006,7 @@
               <a:rPr lang="en-US"/>
               <a:t>Fourth level</a:t>
             </a:r>
+            <a:endParaRPr lang="en-US"/>
           </a:p>
           <a:p>
             <a:pPr lvl="4"/>
@@ -2043,6 +2014,7 @@
               <a:rPr lang="en-US"/>
               <a:t>Fifth level</a:t>
             </a:r>
+            <a:endParaRPr lang="en-US"/>
           </a:p>
         </p:txBody>
       </p:sp>
@@ -2108,6 +2080,7 @@
               <a:rPr lang="en-US"/>
               <a:t>Click to edit Master text styles</a:t>
             </a:r>
+            <a:endParaRPr lang="en-US"/>
           </a:p>
         </p:txBody>
       </p:sp>
@@ -2128,8 +2101,6 @@
           <a:p>
             <a:fld id="{4FB35DA8-B7CA-4C53-9105-91D1C2AF5D9E}" type="datetimeFigureOut">
               <a:rPr lang="en-US" smtClean="0"/>
-              <a:pPr/>
-              <a:t>7/22/2026</a:t>
             </a:fld>
             <a:endParaRPr lang="en-US"/>
           </a:p>
@@ -2171,19 +2142,12 @@
           <a:p>
             <a:fld id="{84B43C9B-0176-4BDF-AC43-CF4A3890E193}" type="slidenum">
               <a:rPr lang="en-US" smtClean="0"/>
-              <a:pPr/>
-              <a:t>‹#›</a:t>
             </a:fld>
             <a:endParaRPr lang="en-US"/>
           </a:p>
         </p:txBody>
       </p:sp>
     </p:spTree>
-    <p:extLst>
-      <p:ext uri="{BB962C8B-B14F-4D97-AF65-F5344CB8AC3E}">
-        <p14:creationId xmlns:p14="http://schemas.microsoft.com/office/powerpoint/2010/main" val="1351343155"/>
-      </p:ext>
-    </p:extLst>
   </p:cSld>
   <p:clrMapOvr>
     <a:masterClrMapping/>
@@ -2236,6 +2200,7 @@
               <a:rPr lang="en-US"/>
               <a:t>Click to edit Master title style</a:t>
             </a:r>
+            <a:endParaRPr lang="en-US"/>
           </a:p>
         </p:txBody>
       </p:sp>
@@ -2362,6 +2327,7 @@
               <a:rPr lang="en-US"/>
               <a:t>Click to edit Master text styles</a:t>
             </a:r>
+            <a:endParaRPr lang="en-US"/>
           </a:p>
         </p:txBody>
       </p:sp>
@@ -2382,8 +2348,6 @@
           <a:p>
             <a:fld id="{4FB35DA8-B7CA-4C53-9105-91D1C2AF5D9E}" type="datetimeFigureOut">
               <a:rPr lang="en-US" smtClean="0"/>
-              <a:pPr/>
-              <a:t>7/22/2026</a:t>
             </a:fld>
             <a:endParaRPr lang="en-US"/>
           </a:p>
@@ -2425,19 +2389,12 @@
           <a:p>
             <a:fld id="{84B43C9B-0176-4BDF-AC43-CF4A3890E193}" type="slidenum">
               <a:rPr lang="en-US" smtClean="0"/>
-              <a:pPr/>
-              <a:t>‹#›</a:t>
             </a:fld>
             <a:endParaRPr lang="en-US"/>
           </a:p>
         </p:txBody>
       </p:sp>
     </p:spTree>
-    <p:extLst>
-      <p:ext uri="{BB962C8B-B14F-4D97-AF65-F5344CB8AC3E}">
-        <p14:creationId xmlns:p14="http://schemas.microsoft.com/office/powerpoint/2010/main" val="2987119547"/>
-      </p:ext>
-    </p:extLst>
   </p:cSld>
   <p:clrMapOvr>
     <a:masterClrMapping/>
@@ -2496,6 +2453,7 @@
               <a:rPr lang="en-US"/>
               <a:t>Click to edit Master title style</a:t>
             </a:r>
+            <a:endParaRPr lang="en-US"/>
           </a:p>
         </p:txBody>
       </p:sp>
@@ -2529,6 +2487,7 @@
               <a:rPr lang="en-US"/>
               <a:t>Click to edit Master text styles</a:t>
             </a:r>
+            <a:endParaRPr lang="en-US"/>
           </a:p>
           <a:p>
             <a:pPr lvl="1"/>
@@ -2536,6 +2495,7 @@
               <a:rPr lang="en-US"/>
               <a:t>Second level</a:t>
             </a:r>
+            <a:endParaRPr lang="en-US"/>
           </a:p>
           <a:p>
             <a:pPr lvl="2"/>
@@ -2543,6 +2503,7 @@
               <a:rPr lang="en-US"/>
               <a:t>Third level</a:t>
             </a:r>
+            <a:endParaRPr lang="en-US"/>
           </a:p>
           <a:p>
             <a:pPr lvl="3"/>
@@ -2550,6 +2511,7 @@
               <a:rPr lang="en-US"/>
               <a:t>Fourth level</a:t>
             </a:r>
+            <a:endParaRPr lang="en-US"/>
           </a:p>
           <a:p>
             <a:pPr lvl="4"/>
@@ -2557,6 +2519,7 @@
               <a:rPr lang="en-US"/>
               <a:t>Fifth level</a:t>
             </a:r>
+            <a:endParaRPr lang="en-US"/>
           </a:p>
         </p:txBody>
       </p:sp>
@@ -2595,8 +2558,6 @@
           <a:p>
             <a:fld id="{4FB35DA8-B7CA-4C53-9105-91D1C2AF5D9E}" type="datetimeFigureOut">
               <a:rPr lang="en-US" smtClean="0"/>
-              <a:pPr/>
-              <a:t>7/22/2026</a:t>
             </a:fld>
             <a:endParaRPr lang="en-US"/>
           </a:p>
@@ -2674,19 +2635,12 @@
           <a:p>
             <a:fld id="{84B43C9B-0176-4BDF-AC43-CF4A3890E193}" type="slidenum">
               <a:rPr lang="en-US" smtClean="0"/>
-              <a:pPr/>
-              <a:t>‹#›</a:t>
             </a:fld>
             <a:endParaRPr lang="en-US"/>
           </a:p>
         </p:txBody>
       </p:sp>
     </p:spTree>
-    <p:extLst>
-      <p:ext uri="{BB962C8B-B14F-4D97-AF65-F5344CB8AC3E}">
-        <p14:creationId xmlns:p14="http://schemas.microsoft.com/office/powerpoint/2010/main" val="2490179765"/>
-      </p:ext>
-    </p:extLst>
   </p:cSld>
   <p:clrMap bg1="lt1" tx1="dk1" bg2="lt2" tx2="dk2" accent1="accent1" accent2="accent2" accent3="accent3" accent4="accent4" accent5="accent5" accent6="accent6" hlink="hlink" folHlink="folHlink"/>
   <p:sldLayoutIdLst>
@@ -3012,10 +2966,15 @@
             <p:ph type="ctrTitle"/>
           </p:nvPr>
         </p:nvSpPr>
-        <p:spPr/>
+        <p:spPr>
+          <a:xfrm>
+            <a:off x="1195705" y="1945640"/>
+            <a:ext cx="9992360" cy="2966085"/>
+          </a:xfrm>
+        </p:spPr>
         <p:txBody>
           <a:bodyPr>
-            <a:normAutofit fontScale="90000"/>
+            <a:normAutofit/>
           </a:bodyPr>
           <a:lstStyle/>
           <a:p>
@@ -3031,38 +2990,11 @@
               <a:rPr lang="en-US" b="1" dirty="0"/>
               <a:t>Explained With an Example </a:t>
             </a:r>
-            <a:br>
-              <a:rPr lang="en-US" b="1" dirty="0"/>
-            </a:br>
             <a:endParaRPr lang="en-US" dirty="0"/>
-          </a:p>
-        </p:txBody>
-      </p:sp>
-      <p:sp>
-        <p:nvSpPr>
-          <p:cNvPr id="3" name="Subtitle 2"/>
-          <p:cNvSpPr>
-            <a:spLocks noGrp="1"/>
-          </p:cNvSpPr>
-          <p:nvPr>
-            <p:ph type="subTitle" idx="1"/>
-          </p:nvPr>
-        </p:nvSpPr>
-        <p:spPr/>
-        <p:txBody>
-          <a:bodyPr/>
-          <a:lstStyle/>
-          <a:p>
-            <a:endParaRPr lang="en-US"/>
           </a:p>
         </p:txBody>
       </p:sp>
     </p:spTree>
-    <p:extLst>
-      <p:ext uri="{BB962C8B-B14F-4D97-AF65-F5344CB8AC3E}">
-        <p14:creationId xmlns:p14="http://schemas.microsoft.com/office/powerpoint/2010/main" val="3998511274"/>
-      </p:ext>
-    </p:extLst>
   </p:cSld>
   <p:clrMapOvr>
     <a:masterClrMapping/>
@@ -3138,7 +3070,7 @@
           <p:nvPr/>
         </p:nvPicPr>
         <p:blipFill>
-          <a:blip r:embed="rId2"/>
+          <a:blip r:embed="rId1"/>
           <a:srcRect/>
           <a:stretch>
             <a:fillRect/>
@@ -3243,11 +3175,6 @@
         </p:txBody>
       </p:sp>
     </p:spTree>
-    <p:extLst>
-      <p:ext uri="{BB962C8B-B14F-4D97-AF65-F5344CB8AC3E}">
-        <p14:creationId xmlns:p14="http://schemas.microsoft.com/office/powerpoint/2010/main" val="2270902524"/>
-      </p:ext>
-    </p:extLst>
   </p:cSld>
   <p:clrMapOvr>
     <a:masterClrMapping/>
@@ -3356,7 +3283,7 @@
           <p:nvPr/>
         </p:nvPicPr>
         <p:blipFill>
-          <a:blip r:embed="rId2"/>
+          <a:blip r:embed="rId1"/>
           <a:stretch>
             <a:fillRect/>
           </a:stretch>
@@ -3372,11 +3299,6 @@
         </p:spPr>
       </p:pic>
     </p:spTree>
-    <p:extLst>
-      <p:ext uri="{BB962C8B-B14F-4D97-AF65-F5344CB8AC3E}">
-        <p14:creationId xmlns:p14="http://schemas.microsoft.com/office/powerpoint/2010/main" val="1083136414"/>
-      </p:ext>
-    </p:extLst>
   </p:cSld>
   <p:clrMapOvr>
     <a:masterClrMapping/>
@@ -3476,7 +3398,7 @@
           <p:nvPr/>
         </p:nvPicPr>
         <p:blipFill>
-          <a:blip r:embed="rId2"/>
+          <a:blip r:embed="rId1"/>
           <a:stretch>
             <a:fillRect/>
           </a:stretch>
@@ -3492,11 +3414,6 @@
         </p:spPr>
       </p:pic>
     </p:spTree>
-    <p:extLst>
-      <p:ext uri="{BB962C8B-B14F-4D97-AF65-F5344CB8AC3E}">
-        <p14:creationId xmlns:p14="http://schemas.microsoft.com/office/powerpoint/2010/main" val="2779947869"/>
-      </p:ext>
-    </p:extLst>
   </p:cSld>
   <p:clrMapOvr>
     <a:masterClrMapping/>
@@ -3523,13 +3440,7 @@
       </p:grpSpPr>
       <p:sp>
         <p:nvSpPr>
-          <p:cNvPr id="2" name="Title 1">
-            <a:extLst>
-              <a:ext uri="{FF2B5EF4-FFF2-40B4-BE49-F238E27FC236}">
-                <a16:creationId xmlns:a16="http://schemas.microsoft.com/office/drawing/2014/main" id="{E4D62BB7-C686-5E00-31EF-6F9F145F8E7F}"/>
-              </a:ext>
-            </a:extLst>
-          </p:cNvPr>
+          <p:cNvPr id="2" name="Title 1"/>
           <p:cNvSpPr>
             <a:spLocks noGrp="1"/>
           </p:cNvSpPr>
@@ -3548,13 +3459,7 @@
       </p:sp>
       <p:sp>
         <p:nvSpPr>
-          <p:cNvPr id="3" name="Content Placeholder 2">
-            <a:extLst>
-              <a:ext uri="{FF2B5EF4-FFF2-40B4-BE49-F238E27FC236}">
-                <a16:creationId xmlns:a16="http://schemas.microsoft.com/office/drawing/2014/main" id="{9ADC0B90-EDCF-5F00-A92D-29F035B89379}"/>
-              </a:ext>
-            </a:extLst>
-          </p:cNvPr>
+          <p:cNvPr id="3" name="Content Placeholder 2"/>
           <p:cNvSpPr>
             <a:spLocks noGrp="1"/>
           </p:cNvSpPr>
@@ -3579,6 +3484,7 @@
               <a:rPr lang="en-US" sz="3200" b="1" dirty="0"/>
               <a:t>:</a:t>
             </a:r>
+            <a:endParaRPr lang="en-US" sz="3200" b="1" dirty="0"/>
           </a:p>
           <a:p>
             <a:pPr lvl="1"/>
@@ -3766,6 +3672,7 @@
               <a:rPr lang="en-US" sz="2800" dirty="0"/>
               <a:t> K = 3)।</a:t>
             </a:r>
+            <a:endParaRPr lang="en-US" sz="2800" dirty="0"/>
           </a:p>
           <a:p>
             <a:pPr lvl="1"/>
@@ -3857,6 +3764,7 @@
               <a:rPr lang="en-US" sz="2800" dirty="0"/>
               <a:t>।</a:t>
             </a:r>
+            <a:endParaRPr lang="en-US" sz="2800" dirty="0"/>
           </a:p>
           <a:p>
             <a:pPr lvl="1"/>
@@ -3948,6 +3856,7 @@
               <a:rPr lang="en-US" sz="2800" dirty="0"/>
               <a:t>।</a:t>
             </a:r>
+            <a:endParaRPr lang="en-US" sz="2800" dirty="0"/>
           </a:p>
           <a:p>
             <a:endParaRPr lang="en-US" dirty="0"/>
@@ -3955,11 +3864,6 @@
         </p:txBody>
       </p:sp>
     </p:spTree>
-    <p:extLst>
-      <p:ext uri="{BB962C8B-B14F-4D97-AF65-F5344CB8AC3E}">
-        <p14:creationId xmlns:p14="http://schemas.microsoft.com/office/powerpoint/2010/main" val="631649654"/>
-      </p:ext>
-    </p:extLst>
   </p:cSld>
   <p:clrMapOvr>
     <a:masterClrMapping/>
@@ -3986,13 +3890,7 @@
       </p:grpSpPr>
       <p:sp>
         <p:nvSpPr>
-          <p:cNvPr id="2" name="Title 1">
-            <a:extLst>
-              <a:ext uri="{FF2B5EF4-FFF2-40B4-BE49-F238E27FC236}">
-                <a16:creationId xmlns:a16="http://schemas.microsoft.com/office/drawing/2014/main" id="{F1F0B0EF-7D63-93A2-23F0-68D4450C2CFC}"/>
-              </a:ext>
-            </a:extLst>
-          </p:cNvPr>
+          <p:cNvPr id="2" name="Title 1"/>
           <p:cNvSpPr>
             <a:spLocks noGrp="1"/>
           </p:cNvSpPr>
@@ -4011,13 +3909,7 @@
       </p:sp>
       <p:sp>
         <p:nvSpPr>
-          <p:cNvPr id="3" name="Content Placeholder 2">
-            <a:extLst>
-              <a:ext uri="{FF2B5EF4-FFF2-40B4-BE49-F238E27FC236}">
-                <a16:creationId xmlns:a16="http://schemas.microsoft.com/office/drawing/2014/main" id="{62F672D4-C145-807B-0A58-8861A6358A7A}"/>
-              </a:ext>
-            </a:extLst>
-          </p:cNvPr>
+          <p:cNvPr id="3" name="Content Placeholder 2"/>
           <p:cNvSpPr>
             <a:spLocks noGrp="1"/>
           </p:cNvSpPr>
@@ -4106,6 +3998,7 @@
               <a:rPr lang="en-US" dirty="0"/>
               <a:t>। </a:t>
             </a:r>
+            <a:endParaRPr lang="en-US" dirty="0"/>
           </a:p>
           <a:p>
             <a:r>
@@ -4236,6 +4129,7 @@
               <a:rPr lang="en-US" dirty="0"/>
               <a:t> Fail)। </a:t>
             </a:r>
+            <a:endParaRPr lang="en-US" dirty="0"/>
           </a:p>
           <a:p>
             <a:r>
@@ -4310,15 +4204,11 @@
               <a:rPr lang="en-US" dirty="0"/>
               <a:t>।</a:t>
             </a:r>
+            <a:endParaRPr lang="en-US" dirty="0"/>
           </a:p>
         </p:txBody>
       </p:sp>
     </p:spTree>
-    <p:extLst>
-      <p:ext uri="{BB962C8B-B14F-4D97-AF65-F5344CB8AC3E}">
-        <p14:creationId xmlns:p14="http://schemas.microsoft.com/office/powerpoint/2010/main" val="3802872350"/>
-      </p:ext>
-    </p:extLst>
   </p:cSld>
   <p:clrMapOvr>
     <a:masterClrMapping/>
@@ -4381,15 +4271,11 @@
               <a:rPr lang="en-US" dirty="0"/>
               <a:t>https://www.youtube.com/watch?v=CJjSPCslxqQ</a:t>
             </a:r>
+            <a:endParaRPr lang="en-US" dirty="0"/>
           </a:p>
         </p:txBody>
       </p:sp>
     </p:spTree>
-    <p:extLst>
-      <p:ext uri="{BB962C8B-B14F-4D97-AF65-F5344CB8AC3E}">
-        <p14:creationId xmlns:p14="http://schemas.microsoft.com/office/powerpoint/2010/main" val="2554770859"/>
-      </p:ext>
-    </p:extLst>
   </p:cSld>
   <p:clrMapOvr>
     <a:masterClrMapping/>
@@ -4416,13 +4302,7 @@
       </p:grpSpPr>
       <p:sp>
         <p:nvSpPr>
-          <p:cNvPr id="2" name="Title 1">
-            <a:extLst>
-              <a:ext uri="{FF2B5EF4-FFF2-40B4-BE49-F238E27FC236}">
-                <a16:creationId xmlns:a16="http://schemas.microsoft.com/office/drawing/2014/main" id="{517B89CA-8759-377C-46AF-174EE5F57F4C}"/>
-              </a:ext>
-            </a:extLst>
-          </p:cNvPr>
+          <p:cNvPr id="2" name="Title 1"/>
           <p:cNvSpPr>
             <a:spLocks noGrp="1"/>
           </p:cNvSpPr>
@@ -4439,18 +4319,13 @@
               <a:rPr lang="en-US" dirty="0"/>
               <a:t>Real-World CS Application: Automated Malware Detection</a:t>
             </a:r>
+            <a:endParaRPr lang="en-US" dirty="0"/>
           </a:p>
         </p:txBody>
       </p:sp>
       <p:sp>
         <p:nvSpPr>
-          <p:cNvPr id="3" name="Content Placeholder 2">
-            <a:extLst>
-              <a:ext uri="{FF2B5EF4-FFF2-40B4-BE49-F238E27FC236}">
-                <a16:creationId xmlns:a16="http://schemas.microsoft.com/office/drawing/2014/main" id="{4F843B08-6CD9-9920-AFB3-CCF8D5EFF81F}"/>
-              </a:ext>
-            </a:extLst>
-          </p:cNvPr>
+          <p:cNvPr id="3" name="Content Placeholder 2"/>
           <p:cNvSpPr>
             <a:spLocks noGrp="1"/>
           </p:cNvSpPr>
@@ -4467,6 +4342,7 @@
               <a:rPr lang="en-US" b="1" dirty="0"/>
               <a:t>Problem Statement</a:t>
             </a:r>
+            <a:endParaRPr lang="en-US" b="1" dirty="0"/>
           </a:p>
           <a:p>
             <a:pPr lvl="1"/>
@@ -4514,6 +4390,11 @@
               </a:rPr>
               <a:t> (Malicious) based on its behavioral telemetry.</a:t>
             </a:r>
+            <a:endParaRPr lang="en-US" dirty="0">
+              <a:solidFill>
+                <a:srgbClr val="FF0000"/>
+              </a:solidFill>
+            </a:endParaRPr>
           </a:p>
           <a:p>
             <a:endParaRPr lang="en-US" dirty="0"/>
@@ -4521,11 +4402,6 @@
         </p:txBody>
       </p:sp>
     </p:spTree>
-    <p:extLst>
-      <p:ext uri="{BB962C8B-B14F-4D97-AF65-F5344CB8AC3E}">
-        <p14:creationId xmlns:p14="http://schemas.microsoft.com/office/powerpoint/2010/main" val="385055534"/>
-      </p:ext>
-    </p:extLst>
   </p:cSld>
   <p:clrMapOvr>
     <a:masterClrMapping/>
@@ -4552,13 +4428,7 @@
       </p:grpSpPr>
       <p:sp>
         <p:nvSpPr>
-          <p:cNvPr id="2" name="Title 1">
-            <a:extLst>
-              <a:ext uri="{FF2B5EF4-FFF2-40B4-BE49-F238E27FC236}">
-                <a16:creationId xmlns:a16="http://schemas.microsoft.com/office/drawing/2014/main" id="{E8AFC47E-EE12-D9FC-7ABD-F390FA6450ED}"/>
-              </a:ext>
-            </a:extLst>
-          </p:cNvPr>
+          <p:cNvPr id="2" name="Title 1"/>
           <p:cNvSpPr>
             <a:spLocks noGrp="1"/>
           </p:cNvSpPr>
@@ -4577,13 +4447,7 @@
       </p:sp>
       <p:graphicFrame>
         <p:nvGraphicFramePr>
-          <p:cNvPr id="6" name="Content Placeholder 5">
-            <a:extLst>
-              <a:ext uri="{FF2B5EF4-FFF2-40B4-BE49-F238E27FC236}">
-                <a16:creationId xmlns:a16="http://schemas.microsoft.com/office/drawing/2014/main" id="{E90EAF21-8AE0-B0C1-5E33-025E1433AD26}"/>
-              </a:ext>
-            </a:extLst>
-          </p:cNvPr>
+          <p:cNvPr id="6" name="Content Placeholder 5"/>
           <p:cNvGraphicFramePr>
             <a:graphicFrameLocks noGrp="1"/>
           </p:cNvGraphicFramePr>
@@ -4602,34 +4466,10 @@
                 <a:tableStyleId>{5C22544A-7EE6-4342-B048-85BDC9FD1C3A}</a:tableStyleId>
               </a:tblPr>
               <a:tblGrid>
-                <a:gridCol w="2628900">
-                  <a:extLst>
-                    <a:ext uri="{9D8B030D-6E8A-4147-A177-3AD203B41FA5}">
-                      <a16:colId xmlns:a16="http://schemas.microsoft.com/office/drawing/2014/main" val="2689175807"/>
-                    </a:ext>
-                  </a:extLst>
-                </a:gridCol>
-                <a:gridCol w="2628900">
-                  <a:extLst>
-                    <a:ext uri="{9D8B030D-6E8A-4147-A177-3AD203B41FA5}">
-                      <a16:colId xmlns:a16="http://schemas.microsoft.com/office/drawing/2014/main" val="2925883130"/>
-                    </a:ext>
-                  </a:extLst>
-                </a:gridCol>
-                <a:gridCol w="2628900">
-                  <a:extLst>
-                    <a:ext uri="{9D8B030D-6E8A-4147-A177-3AD203B41FA5}">
-                      <a16:colId xmlns:a16="http://schemas.microsoft.com/office/drawing/2014/main" val="679982421"/>
-                    </a:ext>
-                  </a:extLst>
-                </a:gridCol>
-                <a:gridCol w="2628900">
-                  <a:extLst>
-                    <a:ext uri="{9D8B030D-6E8A-4147-A177-3AD203B41FA5}">
-                      <a16:colId xmlns:a16="http://schemas.microsoft.com/office/drawing/2014/main" val="509295811"/>
-                    </a:ext>
-                  </a:extLst>
-                </a:gridCol>
+                <a:gridCol w="2628900"/>
+                <a:gridCol w="2628900"/>
+                <a:gridCol w="2628900"/>
+                <a:gridCol w="2628900"/>
               </a:tblGrid>
               <a:tr h="200025">
                 <a:tc>
@@ -4656,7 +4496,7 @@
                         <a:effectLst/>
                         <a:latin typeface="Aptos" panose="020B0004020202020204" pitchFamily="34" charset="0"/>
                         <a:ea typeface="Aptos" panose="020B0004020202020204" pitchFamily="34" charset="0"/>
-                        <a:cs typeface="Times New Roman" panose="02020603050405020304" pitchFamily="18" charset="0"/>
+                        <a:cs typeface="Times New Roman" panose="02020603050405020304" charset="0"/>
                       </a:endParaRPr>
                     </a:p>
                   </a:txBody>
@@ -4686,7 +4526,7 @@
                         <a:effectLst/>
                         <a:latin typeface="Aptos" panose="020B0004020202020204" pitchFamily="34" charset="0"/>
                         <a:ea typeface="Aptos" panose="020B0004020202020204" pitchFamily="34" charset="0"/>
-                        <a:cs typeface="Times New Roman" panose="02020603050405020304" pitchFamily="18" charset="0"/>
+                        <a:cs typeface="Times New Roman" panose="02020603050405020304" charset="0"/>
                       </a:endParaRPr>
                     </a:p>
                   </a:txBody>
@@ -4716,7 +4556,7 @@
                         <a:effectLst/>
                         <a:latin typeface="Aptos" panose="020B0004020202020204" pitchFamily="34" charset="0"/>
                         <a:ea typeface="Aptos" panose="020B0004020202020204" pitchFamily="34" charset="0"/>
-                        <a:cs typeface="Times New Roman" panose="02020603050405020304" pitchFamily="18" charset="0"/>
+                        <a:cs typeface="Times New Roman" panose="02020603050405020304" charset="0"/>
                       </a:endParaRPr>
                     </a:p>
                   </a:txBody>
@@ -4746,17 +4586,12 @@
                         <a:effectLst/>
                         <a:latin typeface="Aptos" panose="020B0004020202020204" pitchFamily="34" charset="0"/>
                         <a:ea typeface="Aptos" panose="020B0004020202020204" pitchFamily="34" charset="0"/>
-                        <a:cs typeface="Times New Roman" panose="02020603050405020304" pitchFamily="18" charset="0"/>
+                        <a:cs typeface="Times New Roman" panose="02020603050405020304" charset="0"/>
                       </a:endParaRPr>
                     </a:p>
                   </a:txBody>
                   <a:tcPr marL="28575" marR="28575" marT="19050" marB="19050" anchor="ctr"/>
                 </a:tc>
-                <a:extLst>
-                  <a:ext uri="{0D108BD9-81ED-4DB2-BD59-A6C34878D82A}">
-                    <a16:rowId xmlns:a16="http://schemas.microsoft.com/office/drawing/2014/main" val="3562208214"/>
-                  </a:ext>
-                </a:extLst>
               </a:tr>
               <a:tr h="200025">
                 <a:tc>
@@ -4783,7 +4618,7 @@
                         <a:effectLst/>
                         <a:latin typeface="Aptos" panose="020B0004020202020204" pitchFamily="34" charset="0"/>
                         <a:ea typeface="Aptos" panose="020B0004020202020204" pitchFamily="34" charset="0"/>
-                        <a:cs typeface="Times New Roman" panose="02020603050405020304" pitchFamily="18" charset="0"/>
+                        <a:cs typeface="Times New Roman" panose="02020603050405020304" charset="0"/>
                       </a:endParaRPr>
                     </a:p>
                   </a:txBody>
@@ -4813,7 +4648,7 @@
                         <a:effectLst/>
                         <a:latin typeface="Aptos" panose="020B0004020202020204" pitchFamily="34" charset="0"/>
                         <a:ea typeface="Aptos" panose="020B0004020202020204" pitchFamily="34" charset="0"/>
-                        <a:cs typeface="Times New Roman" panose="02020603050405020304" pitchFamily="18" charset="0"/>
+                        <a:cs typeface="Times New Roman" panose="02020603050405020304" charset="0"/>
                       </a:endParaRPr>
                     </a:p>
                   </a:txBody>
@@ -4843,7 +4678,7 @@
                         <a:effectLst/>
                         <a:latin typeface="Aptos" panose="020B0004020202020204" pitchFamily="34" charset="0"/>
                         <a:ea typeface="Aptos" panose="020B0004020202020204" pitchFamily="34" charset="0"/>
-                        <a:cs typeface="Times New Roman" panose="02020603050405020304" pitchFamily="18" charset="0"/>
+                        <a:cs typeface="Times New Roman" panose="02020603050405020304" charset="0"/>
                       </a:endParaRPr>
                     </a:p>
                   </a:txBody>
@@ -4873,17 +4708,12 @@
                         <a:effectLst/>
                         <a:latin typeface="Aptos" panose="020B0004020202020204" pitchFamily="34" charset="0"/>
                         <a:ea typeface="Aptos" panose="020B0004020202020204" pitchFamily="34" charset="0"/>
-                        <a:cs typeface="Times New Roman" panose="02020603050405020304" pitchFamily="18" charset="0"/>
+                        <a:cs typeface="Times New Roman" panose="02020603050405020304" charset="0"/>
                       </a:endParaRPr>
                     </a:p>
                   </a:txBody>
                   <a:tcPr marL="28575" marR="28575" marT="19050" marB="19050" anchor="ctr"/>
                 </a:tc>
-                <a:extLst>
-                  <a:ext uri="{0D108BD9-81ED-4DB2-BD59-A6C34878D82A}">
-                    <a16:rowId xmlns:a16="http://schemas.microsoft.com/office/drawing/2014/main" val="2016520710"/>
-                  </a:ext>
-                </a:extLst>
               </a:tr>
               <a:tr h="200025">
                 <a:tc>
@@ -4910,7 +4740,7 @@
                         <a:effectLst/>
                         <a:latin typeface="Aptos" panose="020B0004020202020204" pitchFamily="34" charset="0"/>
                         <a:ea typeface="Aptos" panose="020B0004020202020204" pitchFamily="34" charset="0"/>
-                        <a:cs typeface="Times New Roman" panose="02020603050405020304" pitchFamily="18" charset="0"/>
+                        <a:cs typeface="Times New Roman" panose="02020603050405020304" charset="0"/>
                       </a:endParaRPr>
                     </a:p>
                   </a:txBody>
@@ -4940,7 +4770,7 @@
                         <a:effectLst/>
                         <a:latin typeface="Aptos" panose="020B0004020202020204" pitchFamily="34" charset="0"/>
                         <a:ea typeface="Aptos" panose="020B0004020202020204" pitchFamily="34" charset="0"/>
-                        <a:cs typeface="Times New Roman" panose="02020603050405020304" pitchFamily="18" charset="0"/>
+                        <a:cs typeface="Times New Roman" panose="02020603050405020304" charset="0"/>
                       </a:endParaRPr>
                     </a:p>
                   </a:txBody>
@@ -4970,7 +4800,7 @@
                         <a:effectLst/>
                         <a:latin typeface="Aptos" panose="020B0004020202020204" pitchFamily="34" charset="0"/>
                         <a:ea typeface="Aptos" panose="020B0004020202020204" pitchFamily="34" charset="0"/>
-                        <a:cs typeface="Times New Roman" panose="02020603050405020304" pitchFamily="18" charset="0"/>
+                        <a:cs typeface="Times New Roman" panose="02020603050405020304" charset="0"/>
                       </a:endParaRPr>
                     </a:p>
                   </a:txBody>
@@ -5000,17 +4830,12 @@
                         <a:effectLst/>
                         <a:latin typeface="Aptos" panose="020B0004020202020204" pitchFamily="34" charset="0"/>
                         <a:ea typeface="Aptos" panose="020B0004020202020204" pitchFamily="34" charset="0"/>
-                        <a:cs typeface="Times New Roman" panose="02020603050405020304" pitchFamily="18" charset="0"/>
+                        <a:cs typeface="Times New Roman" panose="02020603050405020304" charset="0"/>
                       </a:endParaRPr>
                     </a:p>
                   </a:txBody>
                   <a:tcPr marL="28575" marR="28575" marT="19050" marB="19050" anchor="ctr"/>
                 </a:tc>
-                <a:extLst>
-                  <a:ext uri="{0D108BD9-81ED-4DB2-BD59-A6C34878D82A}">
-                    <a16:rowId xmlns:a16="http://schemas.microsoft.com/office/drawing/2014/main" val="65228041"/>
-                  </a:ext>
-                </a:extLst>
               </a:tr>
               <a:tr h="200025">
                 <a:tc>
@@ -5037,7 +4862,7 @@
                         <a:effectLst/>
                         <a:latin typeface="Aptos" panose="020B0004020202020204" pitchFamily="34" charset="0"/>
                         <a:ea typeface="Aptos" panose="020B0004020202020204" pitchFamily="34" charset="0"/>
-                        <a:cs typeface="Times New Roman" panose="02020603050405020304" pitchFamily="18" charset="0"/>
+                        <a:cs typeface="Times New Roman" panose="02020603050405020304" charset="0"/>
                       </a:endParaRPr>
                     </a:p>
                   </a:txBody>
@@ -5067,7 +4892,7 @@
                         <a:effectLst/>
                         <a:latin typeface="Aptos" panose="020B0004020202020204" pitchFamily="34" charset="0"/>
                         <a:ea typeface="Aptos" panose="020B0004020202020204" pitchFamily="34" charset="0"/>
-                        <a:cs typeface="Times New Roman" panose="02020603050405020304" pitchFamily="18" charset="0"/>
+                        <a:cs typeface="Times New Roman" panose="02020603050405020304" charset="0"/>
                       </a:endParaRPr>
                     </a:p>
                   </a:txBody>
@@ -5097,7 +4922,7 @@
                         <a:effectLst/>
                         <a:latin typeface="Aptos" panose="020B0004020202020204" pitchFamily="34" charset="0"/>
                         <a:ea typeface="Aptos" panose="020B0004020202020204" pitchFamily="34" charset="0"/>
-                        <a:cs typeface="Times New Roman" panose="02020603050405020304" pitchFamily="18" charset="0"/>
+                        <a:cs typeface="Times New Roman" panose="02020603050405020304" charset="0"/>
                       </a:endParaRPr>
                     </a:p>
                   </a:txBody>
@@ -5127,17 +4952,12 @@
                         <a:effectLst/>
                         <a:latin typeface="Aptos" panose="020B0004020202020204" pitchFamily="34" charset="0"/>
                         <a:ea typeface="Aptos" panose="020B0004020202020204" pitchFamily="34" charset="0"/>
-                        <a:cs typeface="Times New Roman" panose="02020603050405020304" pitchFamily="18" charset="0"/>
+                        <a:cs typeface="Times New Roman" panose="02020603050405020304" charset="0"/>
                       </a:endParaRPr>
                     </a:p>
                   </a:txBody>
                   <a:tcPr marL="28575" marR="28575" marT="19050" marB="19050" anchor="ctr"/>
                 </a:tc>
-                <a:extLst>
-                  <a:ext uri="{0D108BD9-81ED-4DB2-BD59-A6C34878D82A}">
-                    <a16:rowId xmlns:a16="http://schemas.microsoft.com/office/drawing/2014/main" val="840849204"/>
-                  </a:ext>
-                </a:extLst>
               </a:tr>
               <a:tr h="200025">
                 <a:tc>
@@ -5164,7 +4984,7 @@
                         <a:effectLst/>
                         <a:latin typeface="Aptos" panose="020B0004020202020204" pitchFamily="34" charset="0"/>
                         <a:ea typeface="Aptos" panose="020B0004020202020204" pitchFamily="34" charset="0"/>
-                        <a:cs typeface="Times New Roman" panose="02020603050405020304" pitchFamily="18" charset="0"/>
+                        <a:cs typeface="Times New Roman" panose="02020603050405020304" charset="0"/>
                       </a:endParaRPr>
                     </a:p>
                   </a:txBody>
@@ -5194,7 +5014,7 @@
                         <a:effectLst/>
                         <a:latin typeface="Aptos" panose="020B0004020202020204" pitchFamily="34" charset="0"/>
                         <a:ea typeface="Aptos" panose="020B0004020202020204" pitchFamily="34" charset="0"/>
-                        <a:cs typeface="Times New Roman" panose="02020603050405020304" pitchFamily="18" charset="0"/>
+                        <a:cs typeface="Times New Roman" panose="02020603050405020304" charset="0"/>
                       </a:endParaRPr>
                     </a:p>
                   </a:txBody>
@@ -5224,7 +5044,7 @@
                         <a:effectLst/>
                         <a:latin typeface="Aptos" panose="020B0004020202020204" pitchFamily="34" charset="0"/>
                         <a:ea typeface="Aptos" panose="020B0004020202020204" pitchFamily="34" charset="0"/>
-                        <a:cs typeface="Times New Roman" panose="02020603050405020304" pitchFamily="18" charset="0"/>
+                        <a:cs typeface="Times New Roman" panose="02020603050405020304" charset="0"/>
                       </a:endParaRPr>
                     </a:p>
                   </a:txBody>
@@ -5254,17 +5074,12 @@
                         <a:effectLst/>
                         <a:latin typeface="Aptos" panose="020B0004020202020204" pitchFamily="34" charset="0"/>
                         <a:ea typeface="Aptos" panose="020B0004020202020204" pitchFamily="34" charset="0"/>
-                        <a:cs typeface="Times New Roman" panose="02020603050405020304" pitchFamily="18" charset="0"/>
+                        <a:cs typeface="Times New Roman" panose="02020603050405020304" charset="0"/>
                       </a:endParaRPr>
                     </a:p>
                   </a:txBody>
                   <a:tcPr marL="28575" marR="28575" marT="19050" marB="19050" anchor="ctr"/>
                 </a:tc>
-                <a:extLst>
-                  <a:ext uri="{0D108BD9-81ED-4DB2-BD59-A6C34878D82A}">
-                    <a16:rowId xmlns:a16="http://schemas.microsoft.com/office/drawing/2014/main" val="895645380"/>
-                  </a:ext>
-                </a:extLst>
               </a:tr>
               <a:tr h="200025">
                 <a:tc>
@@ -5291,7 +5106,7 @@
                         <a:effectLst/>
                         <a:latin typeface="Aptos" panose="020B0004020202020204" pitchFamily="34" charset="0"/>
                         <a:ea typeface="Aptos" panose="020B0004020202020204" pitchFamily="34" charset="0"/>
-                        <a:cs typeface="Times New Roman" panose="02020603050405020304" pitchFamily="18" charset="0"/>
+                        <a:cs typeface="Times New Roman" panose="02020603050405020304" charset="0"/>
                       </a:endParaRPr>
                     </a:p>
                   </a:txBody>
@@ -5321,7 +5136,7 @@
                         <a:effectLst/>
                         <a:latin typeface="Aptos" panose="020B0004020202020204" pitchFamily="34" charset="0"/>
                         <a:ea typeface="Aptos" panose="020B0004020202020204" pitchFamily="34" charset="0"/>
-                        <a:cs typeface="Times New Roman" panose="02020603050405020304" pitchFamily="18" charset="0"/>
+                        <a:cs typeface="Times New Roman" panose="02020603050405020304" charset="0"/>
                       </a:endParaRPr>
                     </a:p>
                   </a:txBody>
@@ -5351,7 +5166,7 @@
                         <a:effectLst/>
                         <a:latin typeface="Aptos" panose="020B0004020202020204" pitchFamily="34" charset="0"/>
                         <a:ea typeface="Aptos" panose="020B0004020202020204" pitchFamily="34" charset="0"/>
-                        <a:cs typeface="Times New Roman" panose="02020603050405020304" pitchFamily="18" charset="0"/>
+                        <a:cs typeface="Times New Roman" panose="02020603050405020304" charset="0"/>
                       </a:endParaRPr>
                     </a:p>
                   </a:txBody>
@@ -5381,17 +5196,12 @@
                         <a:effectLst/>
                         <a:latin typeface="Aptos" panose="020B0004020202020204" pitchFamily="34" charset="0"/>
                         <a:ea typeface="Aptos" panose="020B0004020202020204" pitchFamily="34" charset="0"/>
-                        <a:cs typeface="Times New Roman" panose="02020603050405020304" pitchFamily="18" charset="0"/>
+                        <a:cs typeface="Times New Roman" panose="02020603050405020304" charset="0"/>
                       </a:endParaRPr>
                     </a:p>
                   </a:txBody>
                   <a:tcPr marL="28575" marR="28575" marT="19050" marB="19050" anchor="ctr"/>
                 </a:tc>
-                <a:extLst>
-                  <a:ext uri="{0D108BD9-81ED-4DB2-BD59-A6C34878D82A}">
-                    <a16:rowId xmlns:a16="http://schemas.microsoft.com/office/drawing/2014/main" val="1643721641"/>
-                  </a:ext>
-                </a:extLst>
               </a:tr>
             </a:tbl>
           </a:graphicData>
@@ -5399,20 +5209,14 @@
       </p:graphicFrame>
       <p:pic>
         <p:nvPicPr>
-          <p:cNvPr id="5" name="Picture 4">
-            <a:extLst>
-              <a:ext uri="{FF2B5EF4-FFF2-40B4-BE49-F238E27FC236}">
-                <a16:creationId xmlns:a16="http://schemas.microsoft.com/office/drawing/2014/main" id="{B9699FAE-3C63-AD46-1047-B026DB0D4CB4}"/>
-              </a:ext>
-            </a:extLst>
-          </p:cNvPr>
+          <p:cNvPr id="5" name="Picture 4"/>
           <p:cNvPicPr>
             <a:picLocks noChangeAspect="1"/>
           </p:cNvPicPr>
           <p:nvPr/>
         </p:nvPicPr>
         <p:blipFill>
-          <a:blip r:embed="rId2"/>
+          <a:blip r:embed="rId1"/>
           <a:stretch>
             <a:fillRect/>
           </a:stretch>
@@ -5429,13 +5233,7 @@
       </p:pic>
       <p:sp>
         <p:nvSpPr>
-          <p:cNvPr id="8" name="TextBox 7">
-            <a:extLst>
-              <a:ext uri="{FF2B5EF4-FFF2-40B4-BE49-F238E27FC236}">
-                <a16:creationId xmlns:a16="http://schemas.microsoft.com/office/drawing/2014/main" id="{BC52F3C0-A20C-8969-5995-851260FA6B4E}"/>
-              </a:ext>
-            </a:extLst>
-          </p:cNvPr>
+          <p:cNvPr id="8" name="TextBox 7"/>
           <p:cNvSpPr txBox="1"/>
           <p:nvPr/>
         </p:nvSpPr>
@@ -5459,15 +5257,11 @@
               <a:rPr lang="en-US" b="1" dirty="0"/>
               <a:t>Training Dataset (Known Telemetry Vectors):</a:t>
             </a:r>
+            <a:endParaRPr lang="en-US" b="1" dirty="0"/>
           </a:p>
         </p:txBody>
       </p:sp>
     </p:spTree>
-    <p:extLst>
-      <p:ext uri="{BB962C8B-B14F-4D97-AF65-F5344CB8AC3E}">
-        <p14:creationId xmlns:p14="http://schemas.microsoft.com/office/powerpoint/2010/main" val="812552136"/>
-      </p:ext>
-    </p:extLst>
   </p:cSld>
   <p:clrMapOvr>
     <a:masterClrMapping/>
@@ -5494,13 +5288,7 @@
       </p:grpSpPr>
       <p:sp>
         <p:nvSpPr>
-          <p:cNvPr id="2" name="Title 1">
-            <a:extLst>
-              <a:ext uri="{FF2B5EF4-FFF2-40B4-BE49-F238E27FC236}">
-                <a16:creationId xmlns:a16="http://schemas.microsoft.com/office/drawing/2014/main" id="{5FAA3F6F-A77C-17DE-4670-869EA28330BA}"/>
-              </a:ext>
-            </a:extLst>
-          </p:cNvPr>
+          <p:cNvPr id="2" name="Title 1"/>
           <p:cNvSpPr>
             <a:spLocks noGrp="1"/>
           </p:cNvSpPr>
@@ -5519,13 +5307,7 @@
       </p:sp>
       <p:sp>
         <p:nvSpPr>
-          <p:cNvPr id="3" name="Content Placeholder 2">
-            <a:extLst>
-              <a:ext uri="{FF2B5EF4-FFF2-40B4-BE49-F238E27FC236}">
-                <a16:creationId xmlns:a16="http://schemas.microsoft.com/office/drawing/2014/main" id="{1BD7802C-F98C-0895-5329-32F609EC883E}"/>
-              </a:ext>
-            </a:extLst>
-          </p:cNvPr>
+          <p:cNvPr id="3" name="Content Placeholder 2"/>
           <p:cNvSpPr>
             <a:spLocks noGrp="1"/>
           </p:cNvSpPr>
@@ -5544,20 +5326,14 @@
       </p:sp>
       <p:pic>
         <p:nvPicPr>
-          <p:cNvPr id="5" name="Picture 4">
-            <a:extLst>
-              <a:ext uri="{FF2B5EF4-FFF2-40B4-BE49-F238E27FC236}">
-                <a16:creationId xmlns:a16="http://schemas.microsoft.com/office/drawing/2014/main" id="{9B7B8D64-7C84-D61F-FE01-41F1BAE5BC60}"/>
-              </a:ext>
-            </a:extLst>
-          </p:cNvPr>
+          <p:cNvPr id="5" name="Picture 4"/>
           <p:cNvPicPr>
             <a:picLocks noChangeAspect="1"/>
           </p:cNvPicPr>
           <p:nvPr/>
         </p:nvPicPr>
         <p:blipFill>
-          <a:blip r:embed="rId2"/>
+          <a:blip r:embed="rId1"/>
           <a:stretch>
             <a:fillRect/>
           </a:stretch>
@@ -5574,20 +5350,14 @@
       </p:pic>
       <p:pic>
         <p:nvPicPr>
-          <p:cNvPr id="7" name="Picture 6">
-            <a:extLst>
-              <a:ext uri="{FF2B5EF4-FFF2-40B4-BE49-F238E27FC236}">
-                <a16:creationId xmlns:a16="http://schemas.microsoft.com/office/drawing/2014/main" id="{37C8A6EF-9AE3-78B5-D106-7E10EF232B7F}"/>
-              </a:ext>
-            </a:extLst>
-          </p:cNvPr>
+          <p:cNvPr id="7" name="Picture 6"/>
           <p:cNvPicPr>
             <a:picLocks noChangeAspect="1"/>
           </p:cNvPicPr>
           <p:nvPr/>
         </p:nvPicPr>
         <p:blipFill>
-          <a:blip r:embed="rId3"/>
+          <a:blip r:embed="rId2"/>
           <a:stretch>
             <a:fillRect/>
           </a:stretch>
@@ -5603,11 +5373,6 @@
         </p:spPr>
       </p:pic>
     </p:spTree>
-    <p:extLst>
-      <p:ext uri="{BB962C8B-B14F-4D97-AF65-F5344CB8AC3E}">
-        <p14:creationId xmlns:p14="http://schemas.microsoft.com/office/powerpoint/2010/main" val="3006161335"/>
-      </p:ext>
-    </p:extLst>
   </p:cSld>
   <p:clrMapOvr>
     <a:masterClrMapping/>
@@ -5693,7 +5458,7 @@
           <p:nvPr/>
         </p:nvPicPr>
         <p:blipFill>
-          <a:blip r:embed="rId2"/>
+          <a:blip r:embed="rId1"/>
           <a:stretch>
             <a:fillRect/>
           </a:stretch>
@@ -5743,11 +5508,6 @@
         </p:txBody>
       </p:sp>
     </p:spTree>
-    <p:extLst>
-      <p:ext uri="{BB962C8B-B14F-4D97-AF65-F5344CB8AC3E}">
-        <p14:creationId xmlns:p14="http://schemas.microsoft.com/office/powerpoint/2010/main" val="1526193689"/>
-      </p:ext>
-    </p:extLst>
   </p:cSld>
   <p:clrMapOvr>
     <a:masterClrMapping/>
@@ -5760,13 +5520,7 @@
   <p:cSld>
     <p:spTree>
       <p:nvGrpSpPr>
-        <p:cNvPr id="1" name="">
-          <a:extLst>
-            <a:ext uri="{FF2B5EF4-FFF2-40B4-BE49-F238E27FC236}">
-              <a16:creationId xmlns:a16="http://schemas.microsoft.com/office/drawing/2014/main" id="{5F48AE7D-3A0B-0BA6-45DB-C010AE71E128}"/>
-            </a:ext>
-          </a:extLst>
-        </p:cNvPr>
+        <p:cNvPr id="1" name=""/>
         <p:cNvGrpSpPr/>
         <p:nvPr/>
       </p:nvGrpSpPr>
@@ -5780,13 +5534,7 @@
       </p:grpSpPr>
       <p:sp>
         <p:nvSpPr>
-          <p:cNvPr id="2" name="Title 1">
-            <a:extLst>
-              <a:ext uri="{FF2B5EF4-FFF2-40B4-BE49-F238E27FC236}">
-                <a16:creationId xmlns:a16="http://schemas.microsoft.com/office/drawing/2014/main" id="{E9ED08C8-728A-6A57-9C84-327F97FEFE32}"/>
-              </a:ext>
-            </a:extLst>
-          </p:cNvPr>
+          <p:cNvPr id="2" name="Title 1"/>
           <p:cNvSpPr>
             <a:spLocks noGrp="1"/>
           </p:cNvSpPr>
@@ -5805,13 +5553,7 @@
       </p:sp>
       <p:sp>
         <p:nvSpPr>
-          <p:cNvPr id="3" name="Content Placeholder 2">
-            <a:extLst>
-              <a:ext uri="{FF2B5EF4-FFF2-40B4-BE49-F238E27FC236}">
-                <a16:creationId xmlns:a16="http://schemas.microsoft.com/office/drawing/2014/main" id="{62B3C0A2-D0BA-0849-9AEF-C44292BEF7CC}"/>
-              </a:ext>
-            </a:extLst>
-          </p:cNvPr>
+          <p:cNvPr id="3" name="Content Placeholder 2"/>
           <p:cNvSpPr>
             <a:spLocks noGrp="1"/>
           </p:cNvSpPr>
@@ -5830,20 +5572,14 @@
       </p:sp>
       <p:pic>
         <p:nvPicPr>
-          <p:cNvPr id="7" name="Picture 6">
-            <a:extLst>
-              <a:ext uri="{FF2B5EF4-FFF2-40B4-BE49-F238E27FC236}">
-                <a16:creationId xmlns:a16="http://schemas.microsoft.com/office/drawing/2014/main" id="{6335E965-DB62-32B7-7714-2FE6E6707721}"/>
-              </a:ext>
-            </a:extLst>
-          </p:cNvPr>
+          <p:cNvPr id="7" name="Picture 6"/>
           <p:cNvPicPr>
             <a:picLocks noChangeAspect="1"/>
           </p:cNvPicPr>
           <p:nvPr/>
         </p:nvPicPr>
         <p:blipFill>
-          <a:blip r:embed="rId2"/>
+          <a:blip r:embed="rId1"/>
           <a:stretch>
             <a:fillRect/>
           </a:stretch>
@@ -5860,20 +5596,14 @@
       </p:pic>
       <p:pic>
         <p:nvPicPr>
-          <p:cNvPr id="6" name="Picture 5">
-            <a:extLst>
-              <a:ext uri="{FF2B5EF4-FFF2-40B4-BE49-F238E27FC236}">
-                <a16:creationId xmlns:a16="http://schemas.microsoft.com/office/drawing/2014/main" id="{BA1BE692-B6F8-A9FB-3CFA-2DBD64D4059E}"/>
-              </a:ext>
-            </a:extLst>
-          </p:cNvPr>
+          <p:cNvPr id="6" name="Picture 5"/>
           <p:cNvPicPr>
             <a:picLocks noChangeAspect="1"/>
           </p:cNvPicPr>
           <p:nvPr/>
         </p:nvPicPr>
         <p:blipFill>
-          <a:blip r:embed="rId3"/>
+          <a:blip r:embed="rId2"/>
           <a:stretch>
             <a:fillRect/>
           </a:stretch>
@@ -5889,11 +5619,6 @@
         </p:spPr>
       </p:pic>
     </p:spTree>
-    <p:extLst>
-      <p:ext uri="{BB962C8B-B14F-4D97-AF65-F5344CB8AC3E}">
-        <p14:creationId xmlns:p14="http://schemas.microsoft.com/office/powerpoint/2010/main" val="2897952952"/>
-      </p:ext>
-    </p:extLst>
   </p:cSld>
   <p:clrMapOvr>
     <a:masterClrMapping/>
@@ -5956,15 +5681,11 @@
               <a:rPr lang="en-US" dirty="0"/>
               <a:t>https://www.youtube.com/watch?v=CLKW6uWJtTc</a:t>
             </a:r>
+            <a:endParaRPr lang="en-US" dirty="0"/>
           </a:p>
         </p:txBody>
       </p:sp>
     </p:spTree>
-    <p:extLst>
-      <p:ext uri="{BB962C8B-B14F-4D97-AF65-F5344CB8AC3E}">
-        <p14:creationId xmlns:p14="http://schemas.microsoft.com/office/powerpoint/2010/main" val="3214989462"/>
-      </p:ext>
-    </p:extLst>
   </p:cSld>
   <p:clrMapOvr>
     <a:masterClrMapping/>
@@ -6013,8 +5734,9 @@
           <a:p>
             <a:r>
               <a:rPr lang="en-US" sz="4000" b="1" dirty="0"/>
-              <a:t>K-means clustering with k=3  (same previous example)</a:t>
-            </a:r>
+              <a:t>K-means clustering with k=3 (same previous example)</a:t>
+            </a:r>
+            <a:endParaRPr lang="en-US" sz="4000" b="1" dirty="0"/>
           </a:p>
         </p:txBody>
       </p:sp>
@@ -6070,6 +5792,11 @@
               </a:rPr>
               <a:t>(185,72), (170,56), (168,60), (179,68), (182,72),</a:t>
             </a:r>
+            <a:endParaRPr lang="en-US" dirty="0">
+              <a:solidFill>
+                <a:srgbClr val="FF0000"/>
+              </a:solidFill>
+            </a:endParaRPr>
           </a:p>
           <a:p>
             <a:r>
@@ -6080,6 +5807,11 @@
               </a:rPr>
               <a:t>(188,77), (180,71), (180,70), (183,84), (180,88),</a:t>
             </a:r>
+            <a:endParaRPr lang="en-US" dirty="0">
+              <a:solidFill>
+                <a:srgbClr val="FF0000"/>
+              </a:solidFill>
+            </a:endParaRPr>
           </a:p>
           <a:p>
             <a:r>
@@ -6090,6 +5822,11 @@
               </a:rPr>
               <a:t>(180,67), (177,76)</a:t>
             </a:r>
+            <a:endParaRPr lang="en-US" dirty="0">
+              <a:solidFill>
+                <a:srgbClr val="FF0000"/>
+              </a:solidFill>
+            </a:endParaRPr>
           </a:p>
         </p:txBody>
       </p:sp>
@@ -6144,6 +5881,7 @@
               <a:rPr lang="en-US" sz="4000" b="1" dirty="0"/>
               <a:t>K-means clustering with k=3  (same previous example)</a:t>
             </a:r>
+            <a:endParaRPr lang="en-US" sz="4000" b="1" dirty="0"/>
           </a:p>
         </p:txBody>
       </p:sp>
@@ -6175,7 +5913,7 @@
           <p:nvPr/>
         </p:nvPicPr>
         <p:blipFill>
-          <a:blip r:embed="rId2"/>
+          <a:blip r:embed="rId1"/>
           <a:srcRect/>
           <a:stretch>
             <a:fillRect/>
@@ -6250,6 +5988,7 @@
               <a:rPr lang="en-US" sz="4000" b="1" dirty="0"/>
               <a:t>K-means clustering with k=3  (same previous example)</a:t>
             </a:r>
+            <a:endParaRPr lang="en-US" sz="4000" b="1" dirty="0"/>
           </a:p>
         </p:txBody>
       </p:sp>
@@ -6281,7 +6020,7 @@
           <p:nvPr/>
         </p:nvPicPr>
         <p:blipFill>
-          <a:blip r:embed="rId2"/>
+          <a:blip r:embed="rId1"/>
           <a:srcRect/>
           <a:stretch>
             <a:fillRect/>
@@ -6356,6 +6095,7 @@
               <a:rPr lang="en-US" sz="4000" b="1" dirty="0"/>
               <a:t>K-means clustering with k=3  (same previous example)</a:t>
             </a:r>
+            <a:endParaRPr lang="en-US" sz="4000" b="1" dirty="0"/>
           </a:p>
         </p:txBody>
       </p:sp>
@@ -6387,7 +6127,7 @@
           <p:nvPr/>
         </p:nvPicPr>
         <p:blipFill>
-          <a:blip r:embed="rId2"/>
+          <a:blip r:embed="rId1"/>
           <a:srcRect/>
           <a:stretch>
             <a:fillRect/>
@@ -6462,6 +6202,7 @@
               <a:rPr lang="en-US" sz="4000" b="1" dirty="0"/>
               <a:t>K-means clustering with k=3  (same previous example)</a:t>
             </a:r>
+            <a:endParaRPr lang="en-US" sz="4000" b="1" dirty="0"/>
           </a:p>
         </p:txBody>
       </p:sp>
@@ -6484,41 +6225,11 @@
             <a:tbl>
               <a:tblPr/>
               <a:tblGrid>
-                <a:gridCol w="1505694">
-                  <a:extLst>
-                    <a:ext uri="{9D8B030D-6E8A-4147-A177-3AD203B41FA5}">
-                      <a16:colId xmlns:a16="http://schemas.microsoft.com/office/drawing/2014/main" val="20000"/>
-                    </a:ext>
-                  </a:extLst>
-                </a:gridCol>
-                <a:gridCol w="1505694">
-                  <a:extLst>
-                    <a:ext uri="{9D8B030D-6E8A-4147-A177-3AD203B41FA5}">
-                      <a16:colId xmlns:a16="http://schemas.microsoft.com/office/drawing/2014/main" val="20001"/>
-                    </a:ext>
-                  </a:extLst>
-                </a:gridCol>
-                <a:gridCol w="1505694">
-                  <a:extLst>
-                    <a:ext uri="{9D8B030D-6E8A-4147-A177-3AD203B41FA5}">
-                      <a16:colId xmlns:a16="http://schemas.microsoft.com/office/drawing/2014/main" val="20002"/>
-                    </a:ext>
-                  </a:extLst>
-                </a:gridCol>
-                <a:gridCol w="1505694">
-                  <a:extLst>
-                    <a:ext uri="{9D8B030D-6E8A-4147-A177-3AD203B41FA5}">
-                      <a16:colId xmlns:a16="http://schemas.microsoft.com/office/drawing/2014/main" val="20003"/>
-                    </a:ext>
-                  </a:extLst>
-                </a:gridCol>
-                <a:gridCol w="1505694">
-                  <a:extLst>
-                    <a:ext uri="{9D8B030D-6E8A-4147-A177-3AD203B41FA5}">
-                      <a16:colId xmlns:a16="http://schemas.microsoft.com/office/drawing/2014/main" val="20004"/>
-                    </a:ext>
-                  </a:extLst>
-                </a:gridCol>
+                <a:gridCol w="1505694"/>
+                <a:gridCol w="1505694"/>
+                <a:gridCol w="1505694"/>
+                <a:gridCol w="1505694"/>
+                <a:gridCol w="1505694"/>
               </a:tblGrid>
               <a:tr h="349486">
                 <a:tc>
@@ -6542,16 +6253,16 @@
                           <a:solidFill>
                             <a:srgbClr val="000000"/>
                           </a:solidFill>
-                          <a:latin typeface="Calibri"/>
-                          <a:ea typeface="Times New Roman"/>
-                          <a:cs typeface="Calibri"/>
+                          <a:latin typeface="Calibri" panose="020F0502020204030204"/>
+                          <a:ea typeface="Times New Roman" panose="02020603050405020304"/>
+                          <a:cs typeface="Calibri" panose="020F0502020204030204"/>
                         </a:rPr>
                         <a:t>Point</a:t>
                       </a:r>
                       <a:endParaRPr lang="en-US" sz="1000" dirty="0">
-                        <a:latin typeface="Calibri"/>
-                        <a:ea typeface="Calibri"/>
-                        <a:cs typeface="Times New Roman"/>
+                        <a:latin typeface="Calibri" panose="020F0502020204030204"/>
+                        <a:ea typeface="Calibri" panose="020F0502020204030204"/>
+                        <a:cs typeface="Times New Roman" panose="02020603050405020304"/>
                       </a:endParaRPr>
                     </a:p>
                   </a:txBody>
@@ -6615,16 +6326,16 @@
                           <a:solidFill>
                             <a:srgbClr val="000000"/>
                           </a:solidFill>
-                          <a:latin typeface="Calibri"/>
-                          <a:ea typeface="Times New Roman"/>
-                          <a:cs typeface="Calibri"/>
+                          <a:latin typeface="Calibri" panose="020F0502020204030204"/>
+                          <a:ea typeface="Times New Roman" panose="02020603050405020304"/>
+                          <a:cs typeface="Calibri" panose="020F0502020204030204"/>
                         </a:rPr>
                         <a:t>C1 (170,56)</a:t>
                       </a:r>
                       <a:endParaRPr lang="en-US" sz="1000">
-                        <a:latin typeface="Calibri"/>
-                        <a:ea typeface="Calibri"/>
-                        <a:cs typeface="Times New Roman"/>
+                        <a:latin typeface="Calibri" panose="020F0502020204030204"/>
+                        <a:ea typeface="Calibri" panose="020F0502020204030204"/>
+                        <a:cs typeface="Times New Roman" panose="02020603050405020304"/>
                       </a:endParaRPr>
                     </a:p>
                   </a:txBody>
@@ -6688,16 +6399,16 @@
                           <a:solidFill>
                             <a:srgbClr val="000000"/>
                           </a:solidFill>
-                          <a:latin typeface="Calibri"/>
-                          <a:ea typeface="Times New Roman"/>
-                          <a:cs typeface="Calibri"/>
+                          <a:latin typeface="Calibri" panose="020F0502020204030204"/>
+                          <a:ea typeface="Times New Roman" panose="02020603050405020304"/>
+                          <a:cs typeface="Calibri" panose="020F0502020204030204"/>
                         </a:rPr>
                         <a:t>C2 (188,77)</a:t>
                       </a:r>
                       <a:endParaRPr lang="en-US" sz="1000">
-                        <a:latin typeface="Calibri"/>
-                        <a:ea typeface="Calibri"/>
-                        <a:cs typeface="Times New Roman"/>
+                        <a:latin typeface="Calibri" panose="020F0502020204030204"/>
+                        <a:ea typeface="Calibri" panose="020F0502020204030204"/>
+                        <a:cs typeface="Times New Roman" panose="02020603050405020304"/>
                       </a:endParaRPr>
                     </a:p>
                   </a:txBody>
@@ -6761,16 +6472,16 @@
                           <a:solidFill>
                             <a:srgbClr val="000000"/>
                           </a:solidFill>
-                          <a:latin typeface="Calibri"/>
-                          <a:ea typeface="Times New Roman"/>
-                          <a:cs typeface="Calibri"/>
+                          <a:latin typeface="Calibri" panose="020F0502020204030204"/>
+                          <a:ea typeface="Times New Roman" panose="02020603050405020304"/>
+                          <a:cs typeface="Calibri" panose="020F0502020204030204"/>
                         </a:rPr>
                         <a:t>C3 (180,88)</a:t>
                       </a:r>
                       <a:endParaRPr lang="en-US" sz="1000">
-                        <a:latin typeface="Calibri"/>
-                        <a:ea typeface="Calibri"/>
-                        <a:cs typeface="Times New Roman"/>
+                        <a:latin typeface="Calibri" panose="020F0502020204030204"/>
+                        <a:ea typeface="Calibri" panose="020F0502020204030204"/>
+                        <a:cs typeface="Times New Roman" panose="02020603050405020304"/>
                       </a:endParaRPr>
                     </a:p>
                   </a:txBody>
@@ -6834,16 +6545,16 @@
                           <a:solidFill>
                             <a:srgbClr val="000000"/>
                           </a:solidFill>
-                          <a:latin typeface="Calibri"/>
-                          <a:ea typeface="Times New Roman"/>
-                          <a:cs typeface="Calibri"/>
+                          <a:latin typeface="Calibri" panose="020F0502020204030204"/>
+                          <a:ea typeface="Times New Roman" panose="02020603050405020304"/>
+                          <a:cs typeface="Calibri" panose="020F0502020204030204"/>
                         </a:rPr>
                         <a:t>Cluster</a:t>
                       </a:r>
                       <a:endParaRPr lang="en-US" sz="1000">
-                        <a:latin typeface="Calibri"/>
-                        <a:ea typeface="Calibri"/>
-                        <a:cs typeface="Times New Roman"/>
+                        <a:latin typeface="Calibri" panose="020F0502020204030204"/>
+                        <a:ea typeface="Calibri" panose="020F0502020204030204"/>
+                        <a:cs typeface="Times New Roman" panose="02020603050405020304"/>
                       </a:endParaRPr>
                     </a:p>
                   </a:txBody>
@@ -6886,11 +6597,6 @@
                     </a:lnB>
                   </a:tcPr>
                 </a:tc>
-                <a:extLst>
-                  <a:ext uri="{0D108BD9-81ED-4DB2-BD59-A6C34878D82A}">
-                    <a16:rowId xmlns:a16="http://schemas.microsoft.com/office/drawing/2014/main" val="10000"/>
-                  </a:ext>
-                </a:extLst>
               </a:tr>
               <a:tr h="333488">
                 <a:tc>
@@ -6914,16 +6620,16 @@
                           <a:solidFill>
                             <a:srgbClr val="000000"/>
                           </a:solidFill>
-                          <a:latin typeface="Calibri"/>
-                          <a:ea typeface="Times New Roman"/>
-                          <a:cs typeface="Calibri"/>
+                          <a:latin typeface="Calibri" panose="020F0502020204030204"/>
+                          <a:ea typeface="Times New Roman" panose="02020603050405020304"/>
+                          <a:cs typeface="Calibri" panose="020F0502020204030204"/>
                         </a:rPr>
                         <a:t>P1 (185,72)</a:t>
                       </a:r>
                       <a:endParaRPr lang="en-US" sz="1000">
-                        <a:latin typeface="Calibri"/>
-                        <a:ea typeface="Calibri"/>
-                        <a:cs typeface="Times New Roman"/>
+                        <a:latin typeface="Calibri" panose="020F0502020204030204"/>
+                        <a:ea typeface="Calibri" panose="020F0502020204030204"/>
+                        <a:cs typeface="Times New Roman" panose="02020603050405020304"/>
                       </a:endParaRPr>
                     </a:p>
                   </a:txBody>
@@ -6987,16 +6693,16 @@
                           <a:solidFill>
                             <a:srgbClr val="000000"/>
                           </a:solidFill>
-                          <a:latin typeface="Calibri"/>
-                          <a:ea typeface="Times New Roman"/>
-                          <a:cs typeface="Calibri"/>
+                          <a:latin typeface="Calibri" panose="020F0502020204030204"/>
+                          <a:ea typeface="Times New Roman" panose="02020603050405020304"/>
+                          <a:cs typeface="Calibri" panose="020F0502020204030204"/>
                         </a:rPr>
                         <a:t>21.93</a:t>
                       </a:r>
                       <a:endParaRPr lang="en-US" sz="1000">
-                        <a:latin typeface="Calibri"/>
-                        <a:ea typeface="Calibri"/>
-                        <a:cs typeface="Times New Roman"/>
+                        <a:latin typeface="Calibri" panose="020F0502020204030204"/>
+                        <a:ea typeface="Calibri" panose="020F0502020204030204"/>
+                        <a:cs typeface="Times New Roman" panose="02020603050405020304"/>
                       </a:endParaRPr>
                     </a:p>
                   </a:txBody>
@@ -7060,16 +6766,16 @@
                           <a:solidFill>
                             <a:srgbClr val="000000"/>
                           </a:solidFill>
-                          <a:latin typeface="Calibri"/>
-                          <a:ea typeface="Times New Roman"/>
-                          <a:cs typeface="Calibri"/>
+                          <a:latin typeface="Calibri" panose="020F0502020204030204"/>
+                          <a:ea typeface="Times New Roman" panose="02020603050405020304"/>
+                          <a:cs typeface="Calibri" panose="020F0502020204030204"/>
                         </a:rPr>
                         <a:t>5.83</a:t>
                       </a:r>
                       <a:endParaRPr lang="en-US" sz="1000">
-                        <a:latin typeface="Calibri"/>
-                        <a:ea typeface="Calibri"/>
-                        <a:cs typeface="Times New Roman"/>
+                        <a:latin typeface="Calibri" panose="020F0502020204030204"/>
+                        <a:ea typeface="Calibri" panose="020F0502020204030204"/>
+                        <a:cs typeface="Times New Roman" panose="02020603050405020304"/>
                       </a:endParaRPr>
                     </a:p>
                   </a:txBody>
@@ -7133,16 +6839,16 @@
                           <a:solidFill>
                             <a:srgbClr val="000000"/>
                           </a:solidFill>
-                          <a:latin typeface="Calibri"/>
-                          <a:ea typeface="Times New Roman"/>
-                          <a:cs typeface="Calibri"/>
+                          <a:latin typeface="Calibri" panose="020F0502020204030204"/>
+                          <a:ea typeface="Times New Roman" panose="02020603050405020304"/>
+                          <a:cs typeface="Calibri" panose="020F0502020204030204"/>
                         </a:rPr>
                         <a:t>16.76</a:t>
                       </a:r>
                       <a:endParaRPr lang="en-US" sz="1000">
-                        <a:latin typeface="Calibri"/>
-                        <a:ea typeface="Calibri"/>
-                        <a:cs typeface="Times New Roman"/>
+                        <a:latin typeface="Calibri" panose="020F0502020204030204"/>
+                        <a:ea typeface="Calibri" panose="020F0502020204030204"/>
+                        <a:cs typeface="Times New Roman" panose="02020603050405020304"/>
                       </a:endParaRPr>
                     </a:p>
                   </a:txBody>
@@ -7206,9 +6912,9 @@
                           <a:solidFill>
                             <a:srgbClr val="000000"/>
                           </a:solidFill>
-                          <a:latin typeface="Calibri"/>
-                          <a:ea typeface="Times New Roman"/>
-                          <a:cs typeface="Calibri"/>
+                          <a:latin typeface="Calibri" panose="020F0502020204030204"/>
+                          <a:ea typeface="Times New Roman" panose="02020603050405020304"/>
+                          <a:cs typeface="Calibri" panose="020F0502020204030204"/>
                         </a:rPr>
                         <a:t>C2</a:t>
                       </a:r>
@@ -7217,16 +6923,16 @@
                           <a:solidFill>
                             <a:srgbClr val="000000"/>
                           </a:solidFill>
-                          <a:latin typeface="Calibri"/>
-                          <a:ea typeface="Times New Roman"/>
-                          <a:cs typeface="Calibri"/>
+                          <a:latin typeface="Calibri" panose="020F0502020204030204"/>
+                          <a:ea typeface="Times New Roman" panose="02020603050405020304"/>
+                          <a:cs typeface="Calibri" panose="020F0502020204030204"/>
                         </a:rPr>
                         <a:t> </a:t>
                       </a:r>
                       <a:endParaRPr lang="en-US" sz="1000">
-                        <a:latin typeface="Calibri"/>
-                        <a:ea typeface="Calibri"/>
-                        <a:cs typeface="Times New Roman"/>
+                        <a:latin typeface="Calibri" panose="020F0502020204030204"/>
+                        <a:ea typeface="Calibri" panose="020F0502020204030204"/>
+                        <a:cs typeface="Times New Roman" panose="02020603050405020304"/>
                       </a:endParaRPr>
                     </a:p>
                   </a:txBody>
@@ -7269,11 +6975,6 @@
                     </a:lnB>
                   </a:tcPr>
                 </a:tc>
-                <a:extLst>
-                  <a:ext uri="{0D108BD9-81ED-4DB2-BD59-A6C34878D82A}">
-                    <a16:rowId xmlns:a16="http://schemas.microsoft.com/office/drawing/2014/main" val="10001"/>
-                  </a:ext>
-                </a:extLst>
               </a:tr>
               <a:tr h="333488">
                 <a:tc>
@@ -7297,16 +6998,16 @@
                           <a:solidFill>
                             <a:srgbClr val="000000"/>
                           </a:solidFill>
-                          <a:latin typeface="Calibri"/>
-                          <a:ea typeface="Times New Roman"/>
-                          <a:cs typeface="Calibri"/>
+                          <a:latin typeface="Calibri" panose="020F0502020204030204"/>
+                          <a:ea typeface="Times New Roman" panose="02020603050405020304"/>
+                          <a:cs typeface="Calibri" panose="020F0502020204030204"/>
                         </a:rPr>
                         <a:t>P2 (170,56)</a:t>
                       </a:r>
                       <a:endParaRPr lang="en-US" sz="1000">
-                        <a:latin typeface="Calibri"/>
-                        <a:ea typeface="Calibri"/>
-                        <a:cs typeface="Times New Roman"/>
+                        <a:latin typeface="Calibri" panose="020F0502020204030204"/>
+                        <a:ea typeface="Calibri" panose="020F0502020204030204"/>
+                        <a:cs typeface="Times New Roman" panose="02020603050405020304"/>
                       </a:endParaRPr>
                     </a:p>
                   </a:txBody>
@@ -7370,16 +7071,16 @@
                           <a:solidFill>
                             <a:srgbClr val="000000"/>
                           </a:solidFill>
-                          <a:latin typeface="Calibri"/>
-                          <a:ea typeface="Times New Roman"/>
-                          <a:cs typeface="Calibri"/>
+                          <a:latin typeface="Calibri" panose="020F0502020204030204"/>
+                          <a:ea typeface="Times New Roman" panose="02020603050405020304"/>
+                          <a:cs typeface="Calibri" panose="020F0502020204030204"/>
                         </a:rPr>
                         <a:t>0</a:t>
                       </a:r>
                       <a:endParaRPr lang="en-US" sz="1000">
-                        <a:latin typeface="Calibri"/>
-                        <a:ea typeface="Calibri"/>
-                        <a:cs typeface="Times New Roman"/>
+                        <a:latin typeface="Calibri" panose="020F0502020204030204"/>
+                        <a:ea typeface="Calibri" panose="020F0502020204030204"/>
+                        <a:cs typeface="Times New Roman" panose="02020603050405020304"/>
                       </a:endParaRPr>
                     </a:p>
                   </a:txBody>
@@ -7443,16 +7144,16 @@
                           <a:solidFill>
                             <a:srgbClr val="000000"/>
                           </a:solidFill>
-                          <a:latin typeface="Calibri"/>
-                          <a:ea typeface="Times New Roman"/>
-                          <a:cs typeface="Calibri"/>
+                          <a:latin typeface="Calibri" panose="020F0502020204030204"/>
+                          <a:ea typeface="Times New Roman" panose="02020603050405020304"/>
+                          <a:cs typeface="Calibri" panose="020F0502020204030204"/>
                         </a:rPr>
                         <a:t>29.83</a:t>
                       </a:r>
                       <a:endParaRPr lang="en-US" sz="1000">
-                        <a:latin typeface="Calibri"/>
-                        <a:ea typeface="Calibri"/>
-                        <a:cs typeface="Times New Roman"/>
+                        <a:latin typeface="Calibri" panose="020F0502020204030204"/>
+                        <a:ea typeface="Calibri" panose="020F0502020204030204"/>
+                        <a:cs typeface="Times New Roman" panose="02020603050405020304"/>
                       </a:endParaRPr>
                     </a:p>
                   </a:txBody>
@@ -7516,16 +7217,16 @@
                           <a:solidFill>
                             <a:srgbClr val="000000"/>
                           </a:solidFill>
-                          <a:latin typeface="Calibri"/>
-                          <a:ea typeface="Times New Roman"/>
-                          <a:cs typeface="Calibri"/>
+                          <a:latin typeface="Calibri" panose="020F0502020204030204"/>
+                          <a:ea typeface="Times New Roman" panose="02020603050405020304"/>
+                          <a:cs typeface="Calibri" panose="020F0502020204030204"/>
                         </a:rPr>
                         <a:t>36.80</a:t>
                       </a:r>
                       <a:endParaRPr lang="en-US" sz="1000">
-                        <a:latin typeface="Calibri"/>
-                        <a:ea typeface="Calibri"/>
-                        <a:cs typeface="Times New Roman"/>
+                        <a:latin typeface="Calibri" panose="020F0502020204030204"/>
+                        <a:ea typeface="Calibri" panose="020F0502020204030204"/>
+                        <a:cs typeface="Times New Roman" panose="02020603050405020304"/>
                       </a:endParaRPr>
                     </a:p>
                   </a:txBody>
@@ -7589,9 +7290,9 @@
                           <a:solidFill>
                             <a:srgbClr val="000000"/>
                           </a:solidFill>
-                          <a:latin typeface="Calibri"/>
-                          <a:ea typeface="Times New Roman"/>
-                          <a:cs typeface="Calibri"/>
+                          <a:latin typeface="Calibri" panose="020F0502020204030204"/>
+                          <a:ea typeface="Times New Roman" panose="02020603050405020304"/>
+                          <a:cs typeface="Calibri" panose="020F0502020204030204"/>
                         </a:rPr>
                         <a:t>C1</a:t>
                       </a:r>
@@ -7600,16 +7301,16 @@
                           <a:solidFill>
                             <a:srgbClr val="000000"/>
                           </a:solidFill>
-                          <a:latin typeface="Calibri"/>
-                          <a:ea typeface="Times New Roman"/>
-                          <a:cs typeface="Calibri"/>
+                          <a:latin typeface="Calibri" panose="020F0502020204030204"/>
+                          <a:ea typeface="Times New Roman" panose="02020603050405020304"/>
+                          <a:cs typeface="Calibri" panose="020F0502020204030204"/>
                         </a:rPr>
                         <a:t> </a:t>
                       </a:r>
                       <a:endParaRPr lang="en-US" sz="1000">
-                        <a:latin typeface="Calibri"/>
-                        <a:ea typeface="Calibri"/>
-                        <a:cs typeface="Times New Roman"/>
+                        <a:latin typeface="Calibri" panose="020F0502020204030204"/>
+                        <a:ea typeface="Calibri" panose="020F0502020204030204"/>
+                        <a:cs typeface="Times New Roman" panose="02020603050405020304"/>
                       </a:endParaRPr>
                     </a:p>
                   </a:txBody>
@@ -7652,11 +7353,6 @@
                     </a:lnB>
                   </a:tcPr>
                 </a:tc>
-                <a:extLst>
-                  <a:ext uri="{0D108BD9-81ED-4DB2-BD59-A6C34878D82A}">
-                    <a16:rowId xmlns:a16="http://schemas.microsoft.com/office/drawing/2014/main" val="10002"/>
-                  </a:ext>
-                </a:extLst>
               </a:tr>
               <a:tr h="333488">
                 <a:tc>
@@ -7680,16 +7376,16 @@
                           <a:solidFill>
                             <a:srgbClr val="000000"/>
                           </a:solidFill>
-                          <a:latin typeface="Calibri"/>
-                          <a:ea typeface="Times New Roman"/>
-                          <a:cs typeface="Calibri"/>
+                          <a:latin typeface="Calibri" panose="020F0502020204030204"/>
+                          <a:ea typeface="Times New Roman" panose="02020603050405020304"/>
+                          <a:cs typeface="Calibri" panose="020F0502020204030204"/>
                         </a:rPr>
                         <a:t>P3 (168,60)</a:t>
                       </a:r>
                       <a:endParaRPr lang="en-US" sz="1000">
-                        <a:latin typeface="Calibri"/>
-                        <a:ea typeface="Calibri"/>
-                        <a:cs typeface="Times New Roman"/>
+                        <a:latin typeface="Calibri" panose="020F0502020204030204"/>
+                        <a:ea typeface="Calibri" panose="020F0502020204030204"/>
+                        <a:cs typeface="Times New Roman" panose="02020603050405020304"/>
                       </a:endParaRPr>
                     </a:p>
                   </a:txBody>
@@ -7753,16 +7449,16 @@
                           <a:solidFill>
                             <a:srgbClr val="000000"/>
                           </a:solidFill>
-                          <a:latin typeface="Calibri"/>
-                          <a:ea typeface="Times New Roman"/>
-                          <a:cs typeface="Calibri"/>
+                          <a:latin typeface="Calibri" panose="020F0502020204030204"/>
+                          <a:ea typeface="Times New Roman" panose="02020603050405020304"/>
+                          <a:cs typeface="Calibri" panose="020F0502020204030204"/>
                         </a:rPr>
                         <a:t>4.47</a:t>
                       </a:r>
                       <a:endParaRPr lang="en-US" sz="1000">
-                        <a:latin typeface="Calibri"/>
-                        <a:ea typeface="Calibri"/>
-                        <a:cs typeface="Times New Roman"/>
+                        <a:latin typeface="Calibri" panose="020F0502020204030204"/>
+                        <a:ea typeface="Calibri" panose="020F0502020204030204"/>
+                        <a:cs typeface="Times New Roman" panose="02020603050405020304"/>
                       </a:endParaRPr>
                     </a:p>
                   </a:txBody>
@@ -7826,16 +7522,16 @@
                           <a:solidFill>
                             <a:srgbClr val="000000"/>
                           </a:solidFill>
-                          <a:latin typeface="Calibri"/>
-                          <a:ea typeface="Times New Roman"/>
-                          <a:cs typeface="Calibri"/>
+                          <a:latin typeface="Calibri" panose="020F0502020204030204"/>
+                          <a:ea typeface="Times New Roman" panose="02020603050405020304"/>
+                          <a:cs typeface="Calibri" panose="020F0502020204030204"/>
                         </a:rPr>
                         <a:t>30.81</a:t>
                       </a:r>
                       <a:endParaRPr lang="en-US" sz="1000">
-                        <a:latin typeface="Calibri"/>
-                        <a:ea typeface="Calibri"/>
-                        <a:cs typeface="Times New Roman"/>
+                        <a:latin typeface="Calibri" panose="020F0502020204030204"/>
+                        <a:ea typeface="Calibri" panose="020F0502020204030204"/>
+                        <a:cs typeface="Times New Roman" panose="02020603050405020304"/>
                       </a:endParaRPr>
                     </a:p>
                   </a:txBody>
@@ -7899,16 +7595,16 @@
                           <a:solidFill>
                             <a:srgbClr val="000000"/>
                           </a:solidFill>
-                          <a:latin typeface="Calibri"/>
-                          <a:ea typeface="Times New Roman"/>
-                          <a:cs typeface="Calibri"/>
+                          <a:latin typeface="Calibri" panose="020F0502020204030204"/>
+                          <a:ea typeface="Times New Roman" panose="02020603050405020304"/>
+                          <a:cs typeface="Calibri" panose="020F0502020204030204"/>
                         </a:rPr>
                         <a:t>35.44</a:t>
                       </a:r>
                       <a:endParaRPr lang="en-US" sz="1000">
-                        <a:latin typeface="Calibri"/>
-                        <a:ea typeface="Calibri"/>
-                        <a:cs typeface="Times New Roman"/>
+                        <a:latin typeface="Calibri" panose="020F0502020204030204"/>
+                        <a:ea typeface="Calibri" panose="020F0502020204030204"/>
+                        <a:cs typeface="Times New Roman" panose="02020603050405020304"/>
                       </a:endParaRPr>
                     </a:p>
                   </a:txBody>
@@ -7972,9 +7668,9 @@
                           <a:solidFill>
                             <a:srgbClr val="000000"/>
                           </a:solidFill>
-                          <a:latin typeface="Calibri"/>
-                          <a:ea typeface="Times New Roman"/>
-                          <a:cs typeface="Calibri"/>
+                          <a:latin typeface="Calibri" panose="020F0502020204030204"/>
+                          <a:ea typeface="Times New Roman" panose="02020603050405020304"/>
+                          <a:cs typeface="Calibri" panose="020F0502020204030204"/>
                         </a:rPr>
                         <a:t>C1</a:t>
                       </a:r>
@@ -7983,16 +7679,16 @@
                           <a:solidFill>
                             <a:srgbClr val="000000"/>
                           </a:solidFill>
-                          <a:latin typeface="Calibri"/>
-                          <a:ea typeface="Times New Roman"/>
-                          <a:cs typeface="Calibri"/>
+                          <a:latin typeface="Calibri" panose="020F0502020204030204"/>
+                          <a:ea typeface="Times New Roman" panose="02020603050405020304"/>
+                          <a:cs typeface="Calibri" panose="020F0502020204030204"/>
                         </a:rPr>
                         <a:t> </a:t>
                       </a:r>
                       <a:endParaRPr lang="en-US" sz="1000">
-                        <a:latin typeface="Calibri"/>
-                        <a:ea typeface="Calibri"/>
-                        <a:cs typeface="Times New Roman"/>
+                        <a:latin typeface="Calibri" panose="020F0502020204030204"/>
+                        <a:ea typeface="Calibri" panose="020F0502020204030204"/>
+                        <a:cs typeface="Times New Roman" panose="02020603050405020304"/>
                       </a:endParaRPr>
                     </a:p>
                   </a:txBody>
@@ -8035,11 +7731,6 @@
                     </a:lnB>
                   </a:tcPr>
                 </a:tc>
-                <a:extLst>
-                  <a:ext uri="{0D108BD9-81ED-4DB2-BD59-A6C34878D82A}">
-                    <a16:rowId xmlns:a16="http://schemas.microsoft.com/office/drawing/2014/main" val="10003"/>
-                  </a:ext>
-                </a:extLst>
               </a:tr>
               <a:tr h="333488">
                 <a:tc>
@@ -8063,16 +7754,16 @@
                           <a:solidFill>
                             <a:srgbClr val="000000"/>
                           </a:solidFill>
-                          <a:latin typeface="Calibri"/>
-                          <a:ea typeface="Times New Roman"/>
-                          <a:cs typeface="Calibri"/>
+                          <a:latin typeface="Calibri" panose="020F0502020204030204"/>
+                          <a:ea typeface="Times New Roman" panose="02020603050405020304"/>
+                          <a:cs typeface="Calibri" panose="020F0502020204030204"/>
                         </a:rPr>
                         <a:t>P4 (179,68)</a:t>
                       </a:r>
                       <a:endParaRPr lang="en-US" sz="1000">
-                        <a:latin typeface="Calibri"/>
-                        <a:ea typeface="Calibri"/>
-                        <a:cs typeface="Times New Roman"/>
+                        <a:latin typeface="Calibri" panose="020F0502020204030204"/>
+                        <a:ea typeface="Calibri" panose="020F0502020204030204"/>
+                        <a:cs typeface="Times New Roman" panose="02020603050405020304"/>
                       </a:endParaRPr>
                     </a:p>
                   </a:txBody>
@@ -8136,16 +7827,16 @@
                           <a:solidFill>
                             <a:srgbClr val="000000"/>
                           </a:solidFill>
-                          <a:latin typeface="Calibri"/>
-                          <a:ea typeface="Times New Roman"/>
-                          <a:cs typeface="Calibri"/>
+                          <a:latin typeface="Calibri" panose="020F0502020204030204"/>
+                          <a:ea typeface="Times New Roman" panose="02020603050405020304"/>
+                          <a:cs typeface="Calibri" panose="020F0502020204030204"/>
                         </a:rPr>
                         <a:t>13.60</a:t>
                       </a:r>
                       <a:endParaRPr lang="en-US" sz="1000">
-                        <a:latin typeface="Calibri"/>
-                        <a:ea typeface="Calibri"/>
-                        <a:cs typeface="Times New Roman"/>
+                        <a:latin typeface="Calibri" panose="020F0502020204030204"/>
+                        <a:ea typeface="Calibri" panose="020F0502020204030204"/>
+                        <a:cs typeface="Times New Roman" panose="02020603050405020304"/>
                       </a:endParaRPr>
                     </a:p>
                   </a:txBody>
@@ -8209,16 +7900,16 @@
                           <a:solidFill>
                             <a:srgbClr val="000000"/>
                           </a:solidFill>
-                          <a:latin typeface="Calibri"/>
-                          <a:ea typeface="Times New Roman"/>
-                          <a:cs typeface="Calibri"/>
+                          <a:latin typeface="Calibri" panose="020F0502020204030204"/>
+                          <a:ea typeface="Times New Roman" panose="02020603050405020304"/>
+                          <a:cs typeface="Calibri" panose="020F0502020204030204"/>
                         </a:rPr>
                         <a:t>11.31</a:t>
                       </a:r>
                       <a:endParaRPr lang="en-US" sz="1000">
-                        <a:latin typeface="Calibri"/>
-                        <a:ea typeface="Calibri"/>
-                        <a:cs typeface="Times New Roman"/>
+                        <a:latin typeface="Calibri" panose="020F0502020204030204"/>
+                        <a:ea typeface="Calibri" panose="020F0502020204030204"/>
+                        <a:cs typeface="Times New Roman" panose="02020603050405020304"/>
                       </a:endParaRPr>
                     </a:p>
                   </a:txBody>
@@ -8282,16 +7973,16 @@
                           <a:solidFill>
                             <a:srgbClr val="000000"/>
                           </a:solidFill>
-                          <a:latin typeface="Calibri"/>
-                          <a:ea typeface="Times New Roman"/>
-                          <a:cs typeface="Calibri"/>
+                          <a:latin typeface="Calibri" panose="020F0502020204030204"/>
+                          <a:ea typeface="Times New Roman" panose="02020603050405020304"/>
+                          <a:cs typeface="Calibri" panose="020F0502020204030204"/>
                         </a:rPr>
                         <a:t>20.10</a:t>
                       </a:r>
                       <a:endParaRPr lang="en-US" sz="1000">
-                        <a:latin typeface="Calibri"/>
-                        <a:ea typeface="Calibri"/>
-                        <a:cs typeface="Times New Roman"/>
+                        <a:latin typeface="Calibri" panose="020F0502020204030204"/>
+                        <a:ea typeface="Calibri" panose="020F0502020204030204"/>
+                        <a:cs typeface="Times New Roman" panose="02020603050405020304"/>
                       </a:endParaRPr>
                     </a:p>
                   </a:txBody>
@@ -8355,9 +8046,9 @@
                           <a:solidFill>
                             <a:srgbClr val="000000"/>
                           </a:solidFill>
-                          <a:latin typeface="Calibri"/>
-                          <a:ea typeface="Times New Roman"/>
-                          <a:cs typeface="Calibri"/>
+                          <a:latin typeface="Calibri" panose="020F0502020204030204"/>
+                          <a:ea typeface="Times New Roman" panose="02020603050405020304"/>
+                          <a:cs typeface="Calibri" panose="020F0502020204030204"/>
                         </a:rPr>
                         <a:t>C2</a:t>
                       </a:r>
@@ -8366,16 +8057,16 @@
                           <a:solidFill>
                             <a:srgbClr val="000000"/>
                           </a:solidFill>
-                          <a:latin typeface="Calibri"/>
-                          <a:ea typeface="Times New Roman"/>
-                          <a:cs typeface="Calibri"/>
+                          <a:latin typeface="Calibri" panose="020F0502020204030204"/>
+                          <a:ea typeface="Times New Roman" panose="02020603050405020304"/>
+                          <a:cs typeface="Calibri" panose="020F0502020204030204"/>
                         </a:rPr>
                         <a:t> </a:t>
                       </a:r>
                       <a:endParaRPr lang="en-US" sz="1000">
-                        <a:latin typeface="Calibri"/>
-                        <a:ea typeface="Calibri"/>
-                        <a:cs typeface="Times New Roman"/>
+                        <a:latin typeface="Calibri" panose="020F0502020204030204"/>
+                        <a:ea typeface="Calibri" panose="020F0502020204030204"/>
+                        <a:cs typeface="Times New Roman" panose="02020603050405020304"/>
                       </a:endParaRPr>
                     </a:p>
                   </a:txBody>
@@ -8418,11 +8109,6 @@
                     </a:lnB>
                   </a:tcPr>
                 </a:tc>
-                <a:extLst>
-                  <a:ext uri="{0D108BD9-81ED-4DB2-BD59-A6C34878D82A}">
-                    <a16:rowId xmlns:a16="http://schemas.microsoft.com/office/drawing/2014/main" val="10004"/>
-                  </a:ext>
-                </a:extLst>
               </a:tr>
               <a:tr h="333488">
                 <a:tc>
@@ -8446,16 +8132,16 @@
                           <a:solidFill>
                             <a:srgbClr val="000000"/>
                           </a:solidFill>
-                          <a:latin typeface="Calibri"/>
-                          <a:ea typeface="Times New Roman"/>
-                          <a:cs typeface="Calibri"/>
+                          <a:latin typeface="Calibri" panose="020F0502020204030204"/>
+                          <a:ea typeface="Times New Roman" panose="02020603050405020304"/>
+                          <a:cs typeface="Calibri" panose="020F0502020204030204"/>
                         </a:rPr>
                         <a:t>P5 (182,72)</a:t>
                       </a:r>
                       <a:endParaRPr lang="en-US" sz="1000">
-                        <a:latin typeface="Calibri"/>
-                        <a:ea typeface="Calibri"/>
-                        <a:cs typeface="Times New Roman"/>
+                        <a:latin typeface="Calibri" panose="020F0502020204030204"/>
+                        <a:ea typeface="Calibri" panose="020F0502020204030204"/>
+                        <a:cs typeface="Times New Roman" panose="02020603050405020304"/>
                       </a:endParaRPr>
                     </a:p>
                   </a:txBody>
@@ -8519,16 +8205,16 @@
                           <a:solidFill>
                             <a:srgbClr val="000000"/>
                           </a:solidFill>
-                          <a:latin typeface="Calibri"/>
-                          <a:ea typeface="Times New Roman"/>
-                          <a:cs typeface="Calibri"/>
+                          <a:latin typeface="Calibri" panose="020F0502020204030204"/>
+                          <a:ea typeface="Times New Roman" panose="02020603050405020304"/>
+                          <a:cs typeface="Calibri" panose="020F0502020204030204"/>
                         </a:rPr>
                         <a:t>18.87</a:t>
                       </a:r>
                       <a:endParaRPr lang="en-US" sz="1000">
-                        <a:latin typeface="Calibri"/>
-                        <a:ea typeface="Calibri"/>
-                        <a:cs typeface="Times New Roman"/>
+                        <a:latin typeface="Calibri" panose="020F0502020204030204"/>
+                        <a:ea typeface="Calibri" panose="020F0502020204030204"/>
+                        <a:cs typeface="Times New Roman" panose="02020603050405020304"/>
                       </a:endParaRPr>
                     </a:p>
                   </a:txBody>
@@ -8592,16 +8278,16 @@
                           <a:solidFill>
                             <a:srgbClr val="000000"/>
                           </a:solidFill>
-                          <a:latin typeface="Calibri"/>
-                          <a:ea typeface="Times New Roman"/>
-                          <a:cs typeface="Calibri"/>
+                          <a:latin typeface="Calibri" panose="020F0502020204030204"/>
+                          <a:ea typeface="Times New Roman" panose="02020603050405020304"/>
+                          <a:cs typeface="Calibri" panose="020F0502020204030204"/>
                         </a:rPr>
                         <a:t>6.71</a:t>
                       </a:r>
                       <a:endParaRPr lang="en-US" sz="1000">
-                        <a:latin typeface="Calibri"/>
-                        <a:ea typeface="Calibri"/>
-                        <a:cs typeface="Times New Roman"/>
+                        <a:latin typeface="Calibri" panose="020F0502020204030204"/>
+                        <a:ea typeface="Calibri" panose="020F0502020204030204"/>
+                        <a:cs typeface="Times New Roman" panose="02020603050405020304"/>
                       </a:endParaRPr>
                     </a:p>
                   </a:txBody>
@@ -8665,16 +8351,16 @@
                           <a:solidFill>
                             <a:srgbClr val="000000"/>
                           </a:solidFill>
-                          <a:latin typeface="Calibri"/>
-                          <a:ea typeface="Times New Roman"/>
-                          <a:cs typeface="Calibri"/>
+                          <a:latin typeface="Calibri" panose="020F0502020204030204"/>
+                          <a:ea typeface="Times New Roman" panose="02020603050405020304"/>
+                          <a:cs typeface="Calibri" panose="020F0502020204030204"/>
                         </a:rPr>
                         <a:t>16.28</a:t>
                       </a:r>
                       <a:endParaRPr lang="en-US" sz="1000">
-                        <a:latin typeface="Calibri"/>
-                        <a:ea typeface="Calibri"/>
-                        <a:cs typeface="Times New Roman"/>
+                        <a:latin typeface="Calibri" panose="020F0502020204030204"/>
+                        <a:ea typeface="Calibri" panose="020F0502020204030204"/>
+                        <a:cs typeface="Times New Roman" panose="02020603050405020304"/>
                       </a:endParaRPr>
                     </a:p>
                   </a:txBody>
@@ -8738,9 +8424,9 @@
                           <a:solidFill>
                             <a:srgbClr val="000000"/>
                           </a:solidFill>
-                          <a:latin typeface="Calibri"/>
-                          <a:ea typeface="Times New Roman"/>
-                          <a:cs typeface="Calibri"/>
+                          <a:latin typeface="Calibri" panose="020F0502020204030204"/>
+                          <a:ea typeface="Times New Roman" panose="02020603050405020304"/>
+                          <a:cs typeface="Calibri" panose="020F0502020204030204"/>
                         </a:rPr>
                         <a:t>C2</a:t>
                       </a:r>
@@ -8749,16 +8435,16 @@
                           <a:solidFill>
                             <a:srgbClr val="000000"/>
                           </a:solidFill>
-                          <a:latin typeface="Calibri"/>
-                          <a:ea typeface="Times New Roman"/>
-                          <a:cs typeface="Calibri"/>
+                          <a:latin typeface="Calibri" panose="020F0502020204030204"/>
+                          <a:ea typeface="Times New Roman" panose="02020603050405020304"/>
+                          <a:cs typeface="Calibri" panose="020F0502020204030204"/>
                         </a:rPr>
                         <a:t> </a:t>
                       </a:r>
                       <a:endParaRPr lang="en-US" sz="1000">
-                        <a:latin typeface="Calibri"/>
-                        <a:ea typeface="Calibri"/>
-                        <a:cs typeface="Times New Roman"/>
+                        <a:latin typeface="Calibri" panose="020F0502020204030204"/>
+                        <a:ea typeface="Calibri" panose="020F0502020204030204"/>
+                        <a:cs typeface="Times New Roman" panose="02020603050405020304"/>
                       </a:endParaRPr>
                     </a:p>
                   </a:txBody>
@@ -8801,11 +8487,6 @@
                     </a:lnB>
                   </a:tcPr>
                 </a:tc>
-                <a:extLst>
-                  <a:ext uri="{0D108BD9-81ED-4DB2-BD59-A6C34878D82A}">
-                    <a16:rowId xmlns:a16="http://schemas.microsoft.com/office/drawing/2014/main" val="10005"/>
-                  </a:ext>
-                </a:extLst>
               </a:tr>
               <a:tr h="333488">
                 <a:tc>
@@ -8829,16 +8510,16 @@
                           <a:solidFill>
                             <a:srgbClr val="000000"/>
                           </a:solidFill>
-                          <a:latin typeface="Calibri"/>
-                          <a:ea typeface="Times New Roman"/>
-                          <a:cs typeface="Calibri"/>
+                          <a:latin typeface="Calibri" panose="020F0502020204030204"/>
+                          <a:ea typeface="Times New Roman" panose="02020603050405020304"/>
+                          <a:cs typeface="Calibri" panose="020F0502020204030204"/>
                         </a:rPr>
                         <a:t>P6 (188,77)</a:t>
                       </a:r>
                       <a:endParaRPr lang="en-US" sz="1000">
-                        <a:latin typeface="Calibri"/>
-                        <a:ea typeface="Calibri"/>
-                        <a:cs typeface="Times New Roman"/>
+                        <a:latin typeface="Calibri" panose="020F0502020204030204"/>
+                        <a:ea typeface="Calibri" panose="020F0502020204030204"/>
+                        <a:cs typeface="Times New Roman" panose="02020603050405020304"/>
                       </a:endParaRPr>
                     </a:p>
                   </a:txBody>
@@ -8902,16 +8583,16 @@
                           <a:solidFill>
                             <a:srgbClr val="000000"/>
                           </a:solidFill>
-                          <a:latin typeface="Calibri"/>
-                          <a:ea typeface="Times New Roman"/>
-                          <a:cs typeface="Calibri"/>
+                          <a:latin typeface="Calibri" panose="020F0502020204030204"/>
+                          <a:ea typeface="Times New Roman" panose="02020603050405020304"/>
+                          <a:cs typeface="Calibri" panose="020F0502020204030204"/>
                         </a:rPr>
                         <a:t>29.83</a:t>
                       </a:r>
                       <a:endParaRPr lang="en-US" sz="1000">
-                        <a:latin typeface="Calibri"/>
-                        <a:ea typeface="Calibri"/>
-                        <a:cs typeface="Times New Roman"/>
+                        <a:latin typeface="Calibri" panose="020F0502020204030204"/>
+                        <a:ea typeface="Calibri" panose="020F0502020204030204"/>
+                        <a:cs typeface="Times New Roman" panose="02020603050405020304"/>
                       </a:endParaRPr>
                     </a:p>
                   </a:txBody>
@@ -8975,16 +8656,16 @@
                           <a:solidFill>
                             <a:srgbClr val="000000"/>
                           </a:solidFill>
-                          <a:latin typeface="Calibri"/>
-                          <a:ea typeface="Times New Roman"/>
-                          <a:cs typeface="Calibri"/>
+                          <a:latin typeface="Calibri" panose="020F0502020204030204"/>
+                          <a:ea typeface="Times New Roman" panose="02020603050405020304"/>
+                          <a:cs typeface="Calibri" panose="020F0502020204030204"/>
                         </a:rPr>
                         <a:t>0</a:t>
                       </a:r>
                       <a:endParaRPr lang="en-US" sz="1000">
-                        <a:latin typeface="Calibri"/>
-                        <a:ea typeface="Calibri"/>
-                        <a:cs typeface="Times New Roman"/>
+                        <a:latin typeface="Calibri" panose="020F0502020204030204"/>
+                        <a:ea typeface="Calibri" panose="020F0502020204030204"/>
+                        <a:cs typeface="Times New Roman" panose="02020603050405020304"/>
                       </a:endParaRPr>
                     </a:p>
                   </a:txBody>
@@ -9048,16 +8729,16 @@
                           <a:solidFill>
                             <a:srgbClr val="000000"/>
                           </a:solidFill>
-                          <a:latin typeface="Calibri"/>
-                          <a:ea typeface="Times New Roman"/>
-                          <a:cs typeface="Calibri"/>
+                          <a:latin typeface="Calibri" panose="020F0502020204030204"/>
+                          <a:ea typeface="Times New Roman" panose="02020603050405020304"/>
+                          <a:cs typeface="Calibri" panose="020F0502020204030204"/>
                         </a:rPr>
                         <a:t>15.13</a:t>
                       </a:r>
                       <a:endParaRPr lang="en-US" sz="1000">
-                        <a:latin typeface="Calibri"/>
-                        <a:ea typeface="Calibri"/>
-                        <a:cs typeface="Times New Roman"/>
+                        <a:latin typeface="Calibri" panose="020F0502020204030204"/>
+                        <a:ea typeface="Calibri" panose="020F0502020204030204"/>
+                        <a:cs typeface="Times New Roman" panose="02020603050405020304"/>
                       </a:endParaRPr>
                     </a:p>
                   </a:txBody>
@@ -9121,9 +8802,9 @@
                           <a:solidFill>
                             <a:srgbClr val="000000"/>
                           </a:solidFill>
-                          <a:latin typeface="Calibri"/>
-                          <a:ea typeface="Times New Roman"/>
-                          <a:cs typeface="Calibri"/>
+                          <a:latin typeface="Calibri" panose="020F0502020204030204"/>
+                          <a:ea typeface="Times New Roman" panose="02020603050405020304"/>
+                          <a:cs typeface="Calibri" panose="020F0502020204030204"/>
                         </a:rPr>
                         <a:t>C2</a:t>
                       </a:r>
@@ -9132,16 +8813,16 @@
                           <a:solidFill>
                             <a:srgbClr val="000000"/>
                           </a:solidFill>
-                          <a:latin typeface="Calibri"/>
-                          <a:ea typeface="Times New Roman"/>
-                          <a:cs typeface="Calibri"/>
+                          <a:latin typeface="Calibri" panose="020F0502020204030204"/>
+                          <a:ea typeface="Times New Roman" panose="02020603050405020304"/>
+                          <a:cs typeface="Calibri" panose="020F0502020204030204"/>
                         </a:rPr>
                         <a:t> </a:t>
                       </a:r>
                       <a:endParaRPr lang="en-US" sz="1000">
-                        <a:latin typeface="Calibri"/>
-                        <a:ea typeface="Calibri"/>
-                        <a:cs typeface="Times New Roman"/>
+                        <a:latin typeface="Calibri" panose="020F0502020204030204"/>
+                        <a:ea typeface="Calibri" panose="020F0502020204030204"/>
+                        <a:cs typeface="Times New Roman" panose="02020603050405020304"/>
                       </a:endParaRPr>
                     </a:p>
                   </a:txBody>
@@ -9184,11 +8865,6 @@
                     </a:lnB>
                   </a:tcPr>
                 </a:tc>
-                <a:extLst>
-                  <a:ext uri="{0D108BD9-81ED-4DB2-BD59-A6C34878D82A}">
-                    <a16:rowId xmlns:a16="http://schemas.microsoft.com/office/drawing/2014/main" val="10006"/>
-                  </a:ext>
-                </a:extLst>
               </a:tr>
               <a:tr h="333488">
                 <a:tc>
@@ -9212,16 +8888,16 @@
                           <a:solidFill>
                             <a:srgbClr val="000000"/>
                           </a:solidFill>
-                          <a:latin typeface="Calibri"/>
-                          <a:ea typeface="Times New Roman"/>
-                          <a:cs typeface="Calibri"/>
+                          <a:latin typeface="Calibri" panose="020F0502020204030204"/>
+                          <a:ea typeface="Times New Roman" panose="02020603050405020304"/>
+                          <a:cs typeface="Calibri" panose="020F0502020204030204"/>
                         </a:rPr>
                         <a:t>P7 (180,71)</a:t>
                       </a:r>
                       <a:endParaRPr lang="en-US" sz="1000">
-                        <a:latin typeface="Calibri"/>
-                        <a:ea typeface="Calibri"/>
-                        <a:cs typeface="Times New Roman"/>
+                        <a:latin typeface="Calibri" panose="020F0502020204030204"/>
+                        <a:ea typeface="Calibri" panose="020F0502020204030204"/>
+                        <a:cs typeface="Times New Roman" panose="02020603050405020304"/>
                       </a:endParaRPr>
                     </a:p>
                   </a:txBody>
@@ -9285,16 +8961,16 @@
                           <a:solidFill>
                             <a:srgbClr val="000000"/>
                           </a:solidFill>
-                          <a:latin typeface="Calibri"/>
-                          <a:ea typeface="Times New Roman"/>
-                          <a:cs typeface="Calibri"/>
+                          <a:latin typeface="Calibri" panose="020F0502020204030204"/>
+                          <a:ea typeface="Times New Roman" panose="02020603050405020304"/>
+                          <a:cs typeface="Calibri" panose="020F0502020204030204"/>
                         </a:rPr>
                         <a:t>17.03</a:t>
                       </a:r>
                       <a:endParaRPr lang="en-US" sz="1000">
-                        <a:latin typeface="Calibri"/>
-                        <a:ea typeface="Calibri"/>
-                        <a:cs typeface="Times New Roman"/>
+                        <a:latin typeface="Calibri" panose="020F0502020204030204"/>
+                        <a:ea typeface="Calibri" panose="020F0502020204030204"/>
+                        <a:cs typeface="Times New Roman" panose="02020603050405020304"/>
                       </a:endParaRPr>
                     </a:p>
                   </a:txBody>
@@ -9358,16 +9034,16 @@
                           <a:solidFill>
                             <a:srgbClr val="000000"/>
                           </a:solidFill>
-                          <a:latin typeface="Calibri"/>
-                          <a:ea typeface="Times New Roman"/>
-                          <a:cs typeface="Calibri"/>
+                          <a:latin typeface="Calibri" panose="020F0502020204030204"/>
+                          <a:ea typeface="Times New Roman" panose="02020603050405020304"/>
+                          <a:cs typeface="Calibri" panose="020F0502020204030204"/>
                         </a:rPr>
                         <a:t>9.49</a:t>
                       </a:r>
                       <a:endParaRPr lang="en-US" sz="1000" dirty="0">
-                        <a:latin typeface="Calibri"/>
-                        <a:ea typeface="Calibri"/>
-                        <a:cs typeface="Times New Roman"/>
+                        <a:latin typeface="Calibri" panose="020F0502020204030204"/>
+                        <a:ea typeface="Calibri" panose="020F0502020204030204"/>
+                        <a:cs typeface="Times New Roman" panose="02020603050405020304"/>
                       </a:endParaRPr>
                     </a:p>
                   </a:txBody>
@@ -9431,16 +9107,16 @@
                           <a:solidFill>
                             <a:srgbClr val="000000"/>
                           </a:solidFill>
-                          <a:latin typeface="Calibri"/>
-                          <a:ea typeface="Times New Roman"/>
-                          <a:cs typeface="Calibri"/>
+                          <a:latin typeface="Calibri" panose="020F0502020204030204"/>
+                          <a:ea typeface="Times New Roman" panose="02020603050405020304"/>
+                          <a:cs typeface="Calibri" panose="020F0502020204030204"/>
                         </a:rPr>
                         <a:t>17.00</a:t>
                       </a:r>
                       <a:endParaRPr lang="en-US" sz="1000">
-                        <a:latin typeface="Calibri"/>
-                        <a:ea typeface="Calibri"/>
-                        <a:cs typeface="Times New Roman"/>
+                        <a:latin typeface="Calibri" panose="020F0502020204030204"/>
+                        <a:ea typeface="Calibri" panose="020F0502020204030204"/>
+                        <a:cs typeface="Times New Roman" panose="02020603050405020304"/>
                       </a:endParaRPr>
                     </a:p>
                   </a:txBody>
@@ -9504,9 +9180,9 @@
                           <a:solidFill>
                             <a:srgbClr val="000000"/>
                           </a:solidFill>
-                          <a:latin typeface="Calibri"/>
-                          <a:ea typeface="Times New Roman"/>
-                          <a:cs typeface="Calibri"/>
+                          <a:latin typeface="Calibri" panose="020F0502020204030204"/>
+                          <a:ea typeface="Times New Roman" panose="02020603050405020304"/>
+                          <a:cs typeface="Calibri" panose="020F0502020204030204"/>
                         </a:rPr>
                         <a:t>C2</a:t>
                       </a:r>
@@ -9515,16 +9191,16 @@
                           <a:solidFill>
                             <a:srgbClr val="000000"/>
                           </a:solidFill>
-                          <a:latin typeface="Calibri"/>
-                          <a:ea typeface="Times New Roman"/>
-                          <a:cs typeface="Calibri"/>
+                          <a:latin typeface="Calibri" panose="020F0502020204030204"/>
+                          <a:ea typeface="Times New Roman" panose="02020603050405020304"/>
+                          <a:cs typeface="Calibri" panose="020F0502020204030204"/>
                         </a:rPr>
                         <a:t> </a:t>
                       </a:r>
                       <a:endParaRPr lang="en-US" sz="1000">
-                        <a:latin typeface="Calibri"/>
-                        <a:ea typeface="Calibri"/>
-                        <a:cs typeface="Times New Roman"/>
+                        <a:latin typeface="Calibri" panose="020F0502020204030204"/>
+                        <a:ea typeface="Calibri" panose="020F0502020204030204"/>
+                        <a:cs typeface="Times New Roman" panose="02020603050405020304"/>
                       </a:endParaRPr>
                     </a:p>
                   </a:txBody>
@@ -9567,11 +9243,6 @@
                     </a:lnB>
                   </a:tcPr>
                 </a:tc>
-                <a:extLst>
-                  <a:ext uri="{0D108BD9-81ED-4DB2-BD59-A6C34878D82A}">
-                    <a16:rowId xmlns:a16="http://schemas.microsoft.com/office/drawing/2014/main" val="10007"/>
-                  </a:ext>
-                </a:extLst>
               </a:tr>
               <a:tr h="333488">
                 <a:tc>
@@ -9595,16 +9266,16 @@
                           <a:solidFill>
                             <a:srgbClr val="000000"/>
                           </a:solidFill>
-                          <a:latin typeface="Calibri"/>
-                          <a:ea typeface="Times New Roman"/>
-                          <a:cs typeface="Calibri"/>
+                          <a:latin typeface="Calibri" panose="020F0502020204030204"/>
+                          <a:ea typeface="Times New Roman" panose="02020603050405020304"/>
+                          <a:cs typeface="Calibri" panose="020F0502020204030204"/>
                         </a:rPr>
                         <a:t>P8 (180,70)</a:t>
                       </a:r>
                       <a:endParaRPr lang="en-US" sz="1000">
-                        <a:latin typeface="Calibri"/>
-                        <a:ea typeface="Calibri"/>
-                        <a:cs typeface="Times New Roman"/>
+                        <a:latin typeface="Calibri" panose="020F0502020204030204"/>
+                        <a:ea typeface="Calibri" panose="020F0502020204030204"/>
+                        <a:cs typeface="Times New Roman" panose="02020603050405020304"/>
                       </a:endParaRPr>
                     </a:p>
                   </a:txBody>
@@ -9668,16 +9339,16 @@
                           <a:solidFill>
                             <a:srgbClr val="000000"/>
                           </a:solidFill>
-                          <a:latin typeface="Calibri"/>
-                          <a:ea typeface="Times New Roman"/>
-                          <a:cs typeface="Calibri"/>
+                          <a:latin typeface="Calibri" panose="020F0502020204030204"/>
+                          <a:ea typeface="Times New Roman" panose="02020603050405020304"/>
+                          <a:cs typeface="Calibri" panose="020F0502020204030204"/>
                         </a:rPr>
                         <a:t>16.12</a:t>
                       </a:r>
                       <a:endParaRPr lang="en-US" sz="1000">
-                        <a:latin typeface="Calibri"/>
-                        <a:ea typeface="Calibri"/>
-                        <a:cs typeface="Times New Roman"/>
+                        <a:latin typeface="Calibri" panose="020F0502020204030204"/>
+                        <a:ea typeface="Calibri" panose="020F0502020204030204"/>
+                        <a:cs typeface="Times New Roman" panose="02020603050405020304"/>
                       </a:endParaRPr>
                     </a:p>
                   </a:txBody>
@@ -9741,16 +9412,16 @@
                           <a:solidFill>
                             <a:srgbClr val="000000"/>
                           </a:solidFill>
-                          <a:latin typeface="Calibri"/>
-                          <a:ea typeface="Times New Roman"/>
-                          <a:cs typeface="Calibri"/>
+                          <a:latin typeface="Calibri" panose="020F0502020204030204"/>
+                          <a:ea typeface="Times New Roman" panose="02020603050405020304"/>
+                          <a:cs typeface="Calibri" panose="020F0502020204030204"/>
                         </a:rPr>
                         <a:t>10.20</a:t>
                       </a:r>
                       <a:endParaRPr lang="en-US" sz="1000">
-                        <a:latin typeface="Calibri"/>
-                        <a:ea typeface="Calibri"/>
-                        <a:cs typeface="Times New Roman"/>
+                        <a:latin typeface="Calibri" panose="020F0502020204030204"/>
+                        <a:ea typeface="Calibri" panose="020F0502020204030204"/>
+                        <a:cs typeface="Times New Roman" panose="02020603050405020304"/>
                       </a:endParaRPr>
                     </a:p>
                   </a:txBody>
@@ -9814,16 +9485,16 @@
                           <a:solidFill>
                             <a:srgbClr val="000000"/>
                           </a:solidFill>
-                          <a:latin typeface="Calibri"/>
-                          <a:ea typeface="Times New Roman"/>
-                          <a:cs typeface="Calibri"/>
+                          <a:latin typeface="Calibri" panose="020F0502020204030204"/>
+                          <a:ea typeface="Times New Roman" panose="02020603050405020304"/>
+                          <a:cs typeface="Calibri" panose="020F0502020204030204"/>
                         </a:rPr>
                         <a:t>18.03</a:t>
                       </a:r>
                       <a:endParaRPr lang="en-US" sz="1000">
-                        <a:latin typeface="Calibri"/>
-                        <a:ea typeface="Calibri"/>
-                        <a:cs typeface="Times New Roman"/>
+                        <a:latin typeface="Calibri" panose="020F0502020204030204"/>
+                        <a:ea typeface="Calibri" panose="020F0502020204030204"/>
+                        <a:cs typeface="Times New Roman" panose="02020603050405020304"/>
                       </a:endParaRPr>
                     </a:p>
                   </a:txBody>
@@ -9887,9 +9558,9 @@
                           <a:solidFill>
                             <a:srgbClr val="000000"/>
                           </a:solidFill>
-                          <a:latin typeface="Calibri"/>
-                          <a:ea typeface="Times New Roman"/>
-                          <a:cs typeface="Calibri"/>
+                          <a:latin typeface="Calibri" panose="020F0502020204030204"/>
+                          <a:ea typeface="Times New Roman" panose="02020603050405020304"/>
+                          <a:cs typeface="Calibri" panose="020F0502020204030204"/>
                         </a:rPr>
                         <a:t>C2</a:t>
                       </a:r>
@@ -9898,16 +9569,16 @@
                           <a:solidFill>
                             <a:srgbClr val="000000"/>
                           </a:solidFill>
-                          <a:latin typeface="Calibri"/>
-                          <a:ea typeface="Times New Roman"/>
-                          <a:cs typeface="Calibri"/>
+                          <a:latin typeface="Calibri" panose="020F0502020204030204"/>
+                          <a:ea typeface="Times New Roman" panose="02020603050405020304"/>
+                          <a:cs typeface="Calibri" panose="020F0502020204030204"/>
                         </a:rPr>
                         <a:t> </a:t>
                       </a:r>
                       <a:endParaRPr lang="en-US" sz="1000">
-                        <a:latin typeface="Calibri"/>
-                        <a:ea typeface="Calibri"/>
-                        <a:cs typeface="Times New Roman"/>
+                        <a:latin typeface="Calibri" panose="020F0502020204030204"/>
+                        <a:ea typeface="Calibri" panose="020F0502020204030204"/>
+                        <a:cs typeface="Times New Roman" panose="02020603050405020304"/>
                       </a:endParaRPr>
                     </a:p>
                   </a:txBody>
@@ -9950,11 +9621,6 @@
                     </a:lnB>
                   </a:tcPr>
                 </a:tc>
-                <a:extLst>
-                  <a:ext uri="{0D108BD9-81ED-4DB2-BD59-A6C34878D82A}">
-                    <a16:rowId xmlns:a16="http://schemas.microsoft.com/office/drawing/2014/main" val="10008"/>
-                  </a:ext>
-                </a:extLst>
               </a:tr>
               <a:tr h="333488">
                 <a:tc>
@@ -9978,16 +9644,16 @@
                           <a:solidFill>
                             <a:srgbClr val="000000"/>
                           </a:solidFill>
-                          <a:latin typeface="Calibri"/>
-                          <a:ea typeface="Times New Roman"/>
-                          <a:cs typeface="Calibri"/>
+                          <a:latin typeface="Calibri" panose="020F0502020204030204"/>
+                          <a:ea typeface="Times New Roman" panose="02020603050405020304"/>
+                          <a:cs typeface="Calibri" panose="020F0502020204030204"/>
                         </a:rPr>
                         <a:t>P9 (183,84)</a:t>
                       </a:r>
                       <a:endParaRPr lang="en-US" sz="1000">
-                        <a:latin typeface="Calibri"/>
-                        <a:ea typeface="Calibri"/>
-                        <a:cs typeface="Times New Roman"/>
+                        <a:latin typeface="Calibri" panose="020F0502020204030204"/>
+                        <a:ea typeface="Calibri" panose="020F0502020204030204"/>
+                        <a:cs typeface="Times New Roman" panose="02020603050405020304"/>
                       </a:endParaRPr>
                     </a:p>
                   </a:txBody>
@@ -10051,16 +9717,16 @@
                           <a:solidFill>
                             <a:srgbClr val="000000"/>
                           </a:solidFill>
-                          <a:latin typeface="Calibri"/>
-                          <a:ea typeface="Times New Roman"/>
-                          <a:cs typeface="Calibri"/>
+                          <a:latin typeface="Calibri" panose="020F0502020204030204"/>
+                          <a:ea typeface="Times New Roman" panose="02020603050405020304"/>
+                          <a:cs typeface="Calibri" panose="020F0502020204030204"/>
                         </a:rPr>
                         <a:t>33.88</a:t>
                       </a:r>
                       <a:endParaRPr lang="en-US" sz="1000">
-                        <a:latin typeface="Calibri"/>
-                        <a:ea typeface="Calibri"/>
-                        <a:cs typeface="Times New Roman"/>
+                        <a:latin typeface="Calibri" panose="020F0502020204030204"/>
+                        <a:ea typeface="Calibri" panose="020F0502020204030204"/>
+                        <a:cs typeface="Times New Roman" panose="02020603050405020304"/>
                       </a:endParaRPr>
                     </a:p>
                   </a:txBody>
@@ -10124,16 +9790,16 @@
                           <a:solidFill>
                             <a:srgbClr val="000000"/>
                           </a:solidFill>
-                          <a:latin typeface="Calibri"/>
-                          <a:ea typeface="Times New Roman"/>
-                          <a:cs typeface="Calibri"/>
+                          <a:latin typeface="Calibri" panose="020F0502020204030204"/>
+                          <a:ea typeface="Times New Roman" panose="02020603050405020304"/>
+                          <a:cs typeface="Calibri" panose="020F0502020204030204"/>
                         </a:rPr>
                         <a:t>7.28</a:t>
                       </a:r>
                       <a:endParaRPr lang="en-US" sz="1000">
-                        <a:latin typeface="Calibri"/>
-                        <a:ea typeface="Calibri"/>
-                        <a:cs typeface="Times New Roman"/>
+                        <a:latin typeface="Calibri" panose="020F0502020204030204"/>
+                        <a:ea typeface="Calibri" panose="020F0502020204030204"/>
+                        <a:cs typeface="Times New Roman" panose="02020603050405020304"/>
                       </a:endParaRPr>
                     </a:p>
                   </a:txBody>
@@ -10197,16 +9863,16 @@
                           <a:solidFill>
                             <a:srgbClr val="000000"/>
                           </a:solidFill>
-                          <a:latin typeface="Calibri"/>
-                          <a:ea typeface="Times New Roman"/>
-                          <a:cs typeface="Calibri"/>
+                          <a:latin typeface="Calibri" panose="020F0502020204030204"/>
+                          <a:ea typeface="Times New Roman" panose="02020603050405020304"/>
+                          <a:cs typeface="Calibri" panose="020F0502020204030204"/>
                         </a:rPr>
                         <a:t>5.00</a:t>
                       </a:r>
                       <a:endParaRPr lang="en-US" sz="1000">
-                        <a:latin typeface="Calibri"/>
-                        <a:ea typeface="Calibri"/>
-                        <a:cs typeface="Times New Roman"/>
+                        <a:latin typeface="Calibri" panose="020F0502020204030204"/>
+                        <a:ea typeface="Calibri" panose="020F0502020204030204"/>
+                        <a:cs typeface="Times New Roman" panose="02020603050405020304"/>
                       </a:endParaRPr>
                     </a:p>
                   </a:txBody>
@@ -10270,9 +9936,9 @@
                           <a:solidFill>
                             <a:srgbClr val="000000"/>
                           </a:solidFill>
-                          <a:latin typeface="Calibri"/>
-                          <a:ea typeface="Times New Roman"/>
-                          <a:cs typeface="Calibri"/>
+                          <a:latin typeface="Calibri" panose="020F0502020204030204"/>
+                          <a:ea typeface="Times New Roman" panose="02020603050405020304"/>
+                          <a:cs typeface="Calibri" panose="020F0502020204030204"/>
                         </a:rPr>
                         <a:t>C3</a:t>
                       </a:r>
@@ -10281,16 +9947,16 @@
                           <a:solidFill>
                             <a:srgbClr val="000000"/>
                           </a:solidFill>
-                          <a:latin typeface="Calibri"/>
-                          <a:ea typeface="Times New Roman"/>
-                          <a:cs typeface="Calibri"/>
+                          <a:latin typeface="Calibri" panose="020F0502020204030204"/>
+                          <a:ea typeface="Times New Roman" panose="02020603050405020304"/>
+                          <a:cs typeface="Calibri" panose="020F0502020204030204"/>
                         </a:rPr>
                         <a:t> </a:t>
                       </a:r>
                       <a:endParaRPr lang="en-US" sz="1000">
-                        <a:latin typeface="Calibri"/>
-                        <a:ea typeface="Calibri"/>
-                        <a:cs typeface="Times New Roman"/>
+                        <a:latin typeface="Calibri" panose="020F0502020204030204"/>
+                        <a:ea typeface="Calibri" panose="020F0502020204030204"/>
+                        <a:cs typeface="Times New Roman" panose="02020603050405020304"/>
                       </a:endParaRPr>
                     </a:p>
                   </a:txBody>
@@ -10333,11 +9999,6 @@
                     </a:lnB>
                   </a:tcPr>
                 </a:tc>
-                <a:extLst>
-                  <a:ext uri="{0D108BD9-81ED-4DB2-BD59-A6C34878D82A}">
-                    <a16:rowId xmlns:a16="http://schemas.microsoft.com/office/drawing/2014/main" val="10009"/>
-                  </a:ext>
-                </a:extLst>
               </a:tr>
               <a:tr h="333488">
                 <a:tc>
@@ -10361,16 +10022,16 @@
                           <a:solidFill>
                             <a:srgbClr val="000000"/>
                           </a:solidFill>
-                          <a:latin typeface="Calibri"/>
-                          <a:ea typeface="Times New Roman"/>
-                          <a:cs typeface="Calibri"/>
+                          <a:latin typeface="Calibri" panose="020F0502020204030204"/>
+                          <a:ea typeface="Times New Roman" panose="02020603050405020304"/>
+                          <a:cs typeface="Calibri" panose="020F0502020204030204"/>
                         </a:rPr>
                         <a:t>P10 (180,88)</a:t>
                       </a:r>
                       <a:endParaRPr lang="en-US" sz="1000">
-                        <a:latin typeface="Calibri"/>
-                        <a:ea typeface="Calibri"/>
-                        <a:cs typeface="Times New Roman"/>
+                        <a:latin typeface="Calibri" panose="020F0502020204030204"/>
+                        <a:ea typeface="Calibri" panose="020F0502020204030204"/>
+                        <a:cs typeface="Times New Roman" panose="02020603050405020304"/>
                       </a:endParaRPr>
                     </a:p>
                   </a:txBody>
@@ -10434,16 +10095,16 @@
                           <a:solidFill>
                             <a:srgbClr val="000000"/>
                           </a:solidFill>
-                          <a:latin typeface="Calibri"/>
-                          <a:ea typeface="Times New Roman"/>
-                          <a:cs typeface="Calibri"/>
+                          <a:latin typeface="Calibri" panose="020F0502020204030204"/>
+                          <a:ea typeface="Times New Roman" panose="02020603050405020304"/>
+                          <a:cs typeface="Calibri" panose="020F0502020204030204"/>
                         </a:rPr>
                         <a:t>36.80</a:t>
                       </a:r>
                       <a:endParaRPr lang="en-US" sz="1000">
-                        <a:latin typeface="Calibri"/>
-                        <a:ea typeface="Calibri"/>
-                        <a:cs typeface="Times New Roman"/>
+                        <a:latin typeface="Calibri" panose="020F0502020204030204"/>
+                        <a:ea typeface="Calibri" panose="020F0502020204030204"/>
+                        <a:cs typeface="Times New Roman" panose="02020603050405020304"/>
                       </a:endParaRPr>
                     </a:p>
                   </a:txBody>
@@ -10507,16 +10168,16 @@
                           <a:solidFill>
                             <a:srgbClr val="000000"/>
                           </a:solidFill>
-                          <a:latin typeface="Calibri"/>
-                          <a:ea typeface="Times New Roman"/>
-                          <a:cs typeface="Calibri"/>
+                          <a:latin typeface="Calibri" panose="020F0502020204030204"/>
+                          <a:ea typeface="Times New Roman" panose="02020603050405020304"/>
+                          <a:cs typeface="Calibri" panose="020F0502020204030204"/>
                         </a:rPr>
                         <a:t>15.13</a:t>
                       </a:r>
                       <a:endParaRPr lang="en-US" sz="1000">
-                        <a:latin typeface="Calibri"/>
-                        <a:ea typeface="Calibri"/>
-                        <a:cs typeface="Times New Roman"/>
+                        <a:latin typeface="Calibri" panose="020F0502020204030204"/>
+                        <a:ea typeface="Calibri" panose="020F0502020204030204"/>
+                        <a:cs typeface="Times New Roman" panose="02020603050405020304"/>
                       </a:endParaRPr>
                     </a:p>
                   </a:txBody>
@@ -10580,16 +10241,16 @@
                           <a:solidFill>
                             <a:srgbClr val="000000"/>
                           </a:solidFill>
-                          <a:latin typeface="Calibri"/>
-                          <a:ea typeface="Times New Roman"/>
-                          <a:cs typeface="Calibri"/>
+                          <a:latin typeface="Calibri" panose="020F0502020204030204"/>
+                          <a:ea typeface="Times New Roman" panose="02020603050405020304"/>
+                          <a:cs typeface="Calibri" panose="020F0502020204030204"/>
                         </a:rPr>
                         <a:t>0</a:t>
                       </a:r>
                       <a:endParaRPr lang="en-US" sz="1000">
-                        <a:latin typeface="Calibri"/>
-                        <a:ea typeface="Calibri"/>
-                        <a:cs typeface="Times New Roman"/>
+                        <a:latin typeface="Calibri" panose="020F0502020204030204"/>
+                        <a:ea typeface="Calibri" panose="020F0502020204030204"/>
+                        <a:cs typeface="Times New Roman" panose="02020603050405020304"/>
                       </a:endParaRPr>
                     </a:p>
                   </a:txBody>
@@ -10653,9 +10314,9 @@
                           <a:solidFill>
                             <a:srgbClr val="000000"/>
                           </a:solidFill>
-                          <a:latin typeface="Calibri"/>
-                          <a:ea typeface="Times New Roman"/>
-                          <a:cs typeface="Calibri"/>
+                          <a:latin typeface="Calibri" panose="020F0502020204030204"/>
+                          <a:ea typeface="Times New Roman" panose="02020603050405020304"/>
+                          <a:cs typeface="Calibri" panose="020F0502020204030204"/>
                         </a:rPr>
                         <a:t>C3</a:t>
                       </a:r>
@@ -10664,16 +10325,16 @@
                           <a:solidFill>
                             <a:srgbClr val="000000"/>
                           </a:solidFill>
-                          <a:latin typeface="Calibri"/>
-                          <a:ea typeface="Times New Roman"/>
-                          <a:cs typeface="Calibri"/>
+                          <a:latin typeface="Calibri" panose="020F0502020204030204"/>
+                          <a:ea typeface="Times New Roman" panose="02020603050405020304"/>
+                          <a:cs typeface="Calibri" panose="020F0502020204030204"/>
                         </a:rPr>
                         <a:t> </a:t>
                       </a:r>
                       <a:endParaRPr lang="en-US" sz="1000">
-                        <a:latin typeface="Calibri"/>
-                        <a:ea typeface="Calibri"/>
-                        <a:cs typeface="Times New Roman"/>
+                        <a:latin typeface="Calibri" panose="020F0502020204030204"/>
+                        <a:ea typeface="Calibri" panose="020F0502020204030204"/>
+                        <a:cs typeface="Times New Roman" panose="02020603050405020304"/>
                       </a:endParaRPr>
                     </a:p>
                   </a:txBody>
@@ -10716,11 +10377,6 @@
                     </a:lnB>
                   </a:tcPr>
                 </a:tc>
-                <a:extLst>
-                  <a:ext uri="{0D108BD9-81ED-4DB2-BD59-A6C34878D82A}">
-                    <a16:rowId xmlns:a16="http://schemas.microsoft.com/office/drawing/2014/main" val="10010"/>
-                  </a:ext>
-                </a:extLst>
               </a:tr>
               <a:tr h="333488">
                 <a:tc>
@@ -10744,16 +10400,16 @@
                           <a:solidFill>
                             <a:srgbClr val="000000"/>
                           </a:solidFill>
-                          <a:latin typeface="Calibri"/>
-                          <a:ea typeface="Times New Roman"/>
-                          <a:cs typeface="Calibri"/>
+                          <a:latin typeface="Calibri" panose="020F0502020204030204"/>
+                          <a:ea typeface="Times New Roman" panose="02020603050405020304"/>
+                          <a:cs typeface="Calibri" panose="020F0502020204030204"/>
                         </a:rPr>
                         <a:t>P11 (180,67)</a:t>
                       </a:r>
                       <a:endParaRPr lang="en-US" sz="1000">
-                        <a:latin typeface="Calibri"/>
-                        <a:ea typeface="Calibri"/>
-                        <a:cs typeface="Times New Roman"/>
+                        <a:latin typeface="Calibri" panose="020F0502020204030204"/>
+                        <a:ea typeface="Calibri" panose="020F0502020204030204"/>
+                        <a:cs typeface="Times New Roman" panose="02020603050405020304"/>
                       </a:endParaRPr>
                     </a:p>
                   </a:txBody>
@@ -10817,16 +10473,16 @@
                           <a:solidFill>
                             <a:srgbClr val="000000"/>
                           </a:solidFill>
-                          <a:latin typeface="Calibri"/>
-                          <a:ea typeface="Times New Roman"/>
-                          <a:cs typeface="Calibri"/>
+                          <a:latin typeface="Calibri" panose="020F0502020204030204"/>
+                          <a:ea typeface="Times New Roman" panose="02020603050405020304"/>
+                          <a:cs typeface="Calibri" panose="020F0502020204030204"/>
                         </a:rPr>
                         <a:t>14.87</a:t>
                       </a:r>
                       <a:endParaRPr lang="en-US" sz="1000">
-                        <a:latin typeface="Calibri"/>
-                        <a:ea typeface="Calibri"/>
-                        <a:cs typeface="Times New Roman"/>
+                        <a:latin typeface="Calibri" panose="020F0502020204030204"/>
+                        <a:ea typeface="Calibri" panose="020F0502020204030204"/>
+                        <a:cs typeface="Times New Roman" panose="02020603050405020304"/>
                       </a:endParaRPr>
                     </a:p>
                   </a:txBody>
@@ -10890,16 +10546,16 @@
                           <a:solidFill>
                             <a:srgbClr val="000000"/>
                           </a:solidFill>
-                          <a:latin typeface="Calibri"/>
-                          <a:ea typeface="Times New Roman"/>
-                          <a:cs typeface="Calibri"/>
+                          <a:latin typeface="Calibri" panose="020F0502020204030204"/>
+                          <a:ea typeface="Times New Roman" panose="02020603050405020304"/>
+                          <a:cs typeface="Calibri" panose="020F0502020204030204"/>
                         </a:rPr>
                         <a:t>12.04</a:t>
                       </a:r>
                       <a:endParaRPr lang="en-US" sz="1000">
-                        <a:latin typeface="Calibri"/>
-                        <a:ea typeface="Calibri"/>
-                        <a:cs typeface="Times New Roman"/>
+                        <a:latin typeface="Calibri" panose="020F0502020204030204"/>
+                        <a:ea typeface="Calibri" panose="020F0502020204030204"/>
+                        <a:cs typeface="Times New Roman" panose="02020603050405020304"/>
                       </a:endParaRPr>
                     </a:p>
                   </a:txBody>
@@ -10963,16 +10619,16 @@
                           <a:solidFill>
                             <a:srgbClr val="000000"/>
                           </a:solidFill>
-                          <a:latin typeface="Calibri"/>
-                          <a:ea typeface="Times New Roman"/>
-                          <a:cs typeface="Calibri"/>
+                          <a:latin typeface="Calibri" panose="020F0502020204030204"/>
+                          <a:ea typeface="Times New Roman" panose="02020603050405020304"/>
+                          <a:cs typeface="Calibri" panose="020F0502020204030204"/>
                         </a:rPr>
                         <a:t>21.47</a:t>
                       </a:r>
                       <a:endParaRPr lang="en-US" sz="1000">
-                        <a:latin typeface="Calibri"/>
-                        <a:ea typeface="Calibri"/>
-                        <a:cs typeface="Times New Roman"/>
+                        <a:latin typeface="Calibri" panose="020F0502020204030204"/>
+                        <a:ea typeface="Calibri" panose="020F0502020204030204"/>
+                        <a:cs typeface="Times New Roman" panose="02020603050405020304"/>
                       </a:endParaRPr>
                     </a:p>
                   </a:txBody>
@@ -11036,9 +10692,9 @@
                           <a:solidFill>
                             <a:srgbClr val="000000"/>
                           </a:solidFill>
-                          <a:latin typeface="Calibri"/>
-                          <a:ea typeface="Times New Roman"/>
-                          <a:cs typeface="Calibri"/>
+                          <a:latin typeface="Calibri" panose="020F0502020204030204"/>
+                          <a:ea typeface="Times New Roman" panose="02020603050405020304"/>
+                          <a:cs typeface="Calibri" panose="020F0502020204030204"/>
                         </a:rPr>
                         <a:t>C2</a:t>
                       </a:r>
@@ -11047,16 +10703,16 @@
                           <a:solidFill>
                             <a:srgbClr val="000000"/>
                           </a:solidFill>
-                          <a:latin typeface="Calibri"/>
-                          <a:ea typeface="Times New Roman"/>
-                          <a:cs typeface="Calibri"/>
+                          <a:latin typeface="Calibri" panose="020F0502020204030204"/>
+                          <a:ea typeface="Times New Roman" panose="02020603050405020304"/>
+                          <a:cs typeface="Calibri" panose="020F0502020204030204"/>
                         </a:rPr>
                         <a:t> </a:t>
                       </a:r>
                       <a:endParaRPr lang="en-US" sz="1000">
-                        <a:latin typeface="Calibri"/>
-                        <a:ea typeface="Calibri"/>
-                        <a:cs typeface="Times New Roman"/>
+                        <a:latin typeface="Calibri" panose="020F0502020204030204"/>
+                        <a:ea typeface="Calibri" panose="020F0502020204030204"/>
+                        <a:cs typeface="Times New Roman" panose="02020603050405020304"/>
                       </a:endParaRPr>
                     </a:p>
                   </a:txBody>
@@ -11099,11 +10755,6 @@
                     </a:lnB>
                   </a:tcPr>
                 </a:tc>
-                <a:extLst>
-                  <a:ext uri="{0D108BD9-81ED-4DB2-BD59-A6C34878D82A}">
-                    <a16:rowId xmlns:a16="http://schemas.microsoft.com/office/drawing/2014/main" val="10011"/>
-                  </a:ext>
-                </a:extLst>
               </a:tr>
               <a:tr h="333488">
                 <a:tc>
@@ -11127,16 +10778,16 @@
                           <a:solidFill>
                             <a:srgbClr val="000000"/>
                           </a:solidFill>
-                          <a:latin typeface="Calibri"/>
-                          <a:ea typeface="Times New Roman"/>
-                          <a:cs typeface="Calibri"/>
+                          <a:latin typeface="Calibri" panose="020F0502020204030204"/>
+                          <a:ea typeface="Times New Roman" panose="02020603050405020304"/>
+                          <a:cs typeface="Calibri" panose="020F0502020204030204"/>
                         </a:rPr>
                         <a:t>P12 (177,76)</a:t>
                       </a:r>
                       <a:endParaRPr lang="en-US" sz="1000">
-                        <a:latin typeface="Calibri"/>
-                        <a:ea typeface="Calibri"/>
-                        <a:cs typeface="Times New Roman"/>
+                        <a:latin typeface="Calibri" panose="020F0502020204030204"/>
+                        <a:ea typeface="Calibri" panose="020F0502020204030204"/>
+                        <a:cs typeface="Times New Roman" panose="02020603050405020304"/>
                       </a:endParaRPr>
                     </a:p>
                   </a:txBody>
@@ -11200,16 +10851,16 @@
                           <a:solidFill>
                             <a:srgbClr val="000000"/>
                           </a:solidFill>
-                          <a:latin typeface="Calibri"/>
-                          <a:ea typeface="Times New Roman"/>
-                          <a:cs typeface="Calibri"/>
+                          <a:latin typeface="Calibri" panose="020F0502020204030204"/>
+                          <a:ea typeface="Times New Roman" panose="02020603050405020304"/>
+                          <a:cs typeface="Calibri" panose="020F0502020204030204"/>
                         </a:rPr>
                         <a:t>21.63</a:t>
                       </a:r>
                       <a:endParaRPr lang="en-US" sz="1000">
-                        <a:latin typeface="Calibri"/>
-                        <a:ea typeface="Calibri"/>
-                        <a:cs typeface="Times New Roman"/>
+                        <a:latin typeface="Calibri" panose="020F0502020204030204"/>
+                        <a:ea typeface="Calibri" panose="020F0502020204030204"/>
+                        <a:cs typeface="Times New Roman" panose="02020603050405020304"/>
                       </a:endParaRPr>
                     </a:p>
                   </a:txBody>
@@ -11273,16 +10924,16 @@
                           <a:solidFill>
                             <a:srgbClr val="000000"/>
                           </a:solidFill>
-                          <a:latin typeface="Calibri"/>
-                          <a:ea typeface="Times New Roman"/>
-                          <a:cs typeface="Calibri"/>
+                          <a:latin typeface="Calibri" panose="020F0502020204030204"/>
+                          <a:ea typeface="Times New Roman" panose="02020603050405020304"/>
+                          <a:cs typeface="Calibri" panose="020F0502020204030204"/>
                         </a:rPr>
                         <a:t>11.18</a:t>
                       </a:r>
                       <a:endParaRPr lang="en-US" sz="1000">
-                        <a:latin typeface="Calibri"/>
-                        <a:ea typeface="Calibri"/>
-                        <a:cs typeface="Times New Roman"/>
+                        <a:latin typeface="Calibri" panose="020F0502020204030204"/>
+                        <a:ea typeface="Calibri" panose="020F0502020204030204"/>
+                        <a:cs typeface="Times New Roman" panose="02020603050405020304"/>
                       </a:endParaRPr>
                     </a:p>
                   </a:txBody>
@@ -11346,16 +10997,16 @@
                           <a:solidFill>
                             <a:srgbClr val="000000"/>
                           </a:solidFill>
-                          <a:latin typeface="Calibri"/>
-                          <a:ea typeface="Times New Roman"/>
-                          <a:cs typeface="Calibri"/>
+                          <a:latin typeface="Calibri" panose="020F0502020204030204"/>
+                          <a:ea typeface="Times New Roman" panose="02020603050405020304"/>
+                          <a:cs typeface="Calibri" panose="020F0502020204030204"/>
                         </a:rPr>
                         <a:t>13.00</a:t>
                       </a:r>
                       <a:endParaRPr lang="en-US" sz="1000">
-                        <a:latin typeface="Calibri"/>
-                        <a:ea typeface="Calibri"/>
-                        <a:cs typeface="Times New Roman"/>
+                        <a:latin typeface="Calibri" panose="020F0502020204030204"/>
+                        <a:ea typeface="Calibri" panose="020F0502020204030204"/>
+                        <a:cs typeface="Times New Roman" panose="02020603050405020304"/>
                       </a:endParaRPr>
                     </a:p>
                   </a:txBody>
@@ -11419,9 +11070,9 @@
                           <a:solidFill>
                             <a:srgbClr val="000000"/>
                           </a:solidFill>
-                          <a:latin typeface="Calibri"/>
-                          <a:ea typeface="Times New Roman"/>
-                          <a:cs typeface="Calibri"/>
+                          <a:latin typeface="Calibri" panose="020F0502020204030204"/>
+                          <a:ea typeface="Times New Roman" panose="02020603050405020304"/>
+                          <a:cs typeface="Calibri" panose="020F0502020204030204"/>
                         </a:rPr>
                         <a:t>C2</a:t>
                       </a:r>
@@ -11430,16 +11081,16 @@
                           <a:solidFill>
                             <a:srgbClr val="000000"/>
                           </a:solidFill>
-                          <a:latin typeface="Calibri"/>
-                          <a:ea typeface="Times New Roman"/>
-                          <a:cs typeface="Calibri"/>
+                          <a:latin typeface="Calibri" panose="020F0502020204030204"/>
+                          <a:ea typeface="Times New Roman" panose="02020603050405020304"/>
+                          <a:cs typeface="Calibri" panose="020F0502020204030204"/>
                         </a:rPr>
                         <a:t> </a:t>
                       </a:r>
                       <a:endParaRPr lang="en-US" sz="1000" dirty="0">
-                        <a:latin typeface="Calibri"/>
-                        <a:ea typeface="Calibri"/>
-                        <a:cs typeface="Times New Roman"/>
+                        <a:latin typeface="Calibri" panose="020F0502020204030204"/>
+                        <a:ea typeface="Calibri" panose="020F0502020204030204"/>
+                        <a:cs typeface="Times New Roman" panose="02020603050405020304"/>
                       </a:endParaRPr>
                     </a:p>
                   </a:txBody>
@@ -11482,11 +11133,6 @@
                     </a:lnB>
                   </a:tcPr>
                 </a:tc>
-                <a:extLst>
-                  <a:ext uri="{0D108BD9-81ED-4DB2-BD59-A6C34878D82A}">
-                    <a16:rowId xmlns:a16="http://schemas.microsoft.com/office/drawing/2014/main" val="10012"/>
-                  </a:ext>
-                </a:extLst>
               </a:tr>
             </a:tbl>
           </a:graphicData>
@@ -11521,6 +11167,7 @@
               <a:rPr lang="en-US" dirty="0"/>
               <a:t>)</a:t>
             </a:r>
+            <a:endParaRPr lang="en-US" dirty="0"/>
           </a:p>
         </p:txBody>
       </p:sp>
@@ -11533,7 +11180,7 @@
           <p:nvPr/>
         </p:nvPicPr>
         <p:blipFill>
-          <a:blip r:embed="rId2"/>
+          <a:blip r:embed="rId1"/>
           <a:srcRect/>
           <a:stretch>
             <a:fillRect/>
@@ -11624,6 +11271,7 @@
               <a:rPr lang="en-US" b="1" dirty="0"/>
               <a:t>Step 4: Reassign Points</a:t>
             </a:r>
+            <a:endParaRPr lang="en-US" b="1" dirty="0"/>
           </a:p>
           <a:p>
             <a:pPr lvl="1"/>
@@ -11674,6 +11322,7 @@
               <a:rPr lang="en-US" dirty="0"/>
               <a:t> don't change significantly.</a:t>
             </a:r>
+            <a:endParaRPr lang="en-US" dirty="0"/>
           </a:p>
           <a:p>
             <a:endParaRPr lang="en-US" dirty="0"/>
@@ -11939,8 +11588,6 @@
       </a:bgFillStyleLst>
     </a:fmtScheme>
   </a:themeElements>
-  <a:objectDefaults/>
-  <a:extraClrSchemeLst/>
   <a:extLst>
     <a:ext uri="{05A4C25C-085E-4340-85A3-A5531E510DB2}">
       <thm15:themeFamily xmlns:thm15="http://schemas.microsoft.com/office/thememl/2012/main" name="Office Theme" id="{62F939B6-93AF-4DB8-9C6B-D6C7DFDC589F}" vid="{4A3C46E8-61CC-4603-A589-7422A47A8E4A}"/>
